--- a/research/presentations/midterm-presentation-slides.pptx
+++ b/research/presentations/midterm-presentation-slides.pptx
@@ -22,6 +22,8 @@
     <p:sldId id="270" r:id="rId21"/>
     <p:sldId id="271" r:id="rId22"/>
     <p:sldId id="272" r:id="rId23"/>
+    <p:sldId id="273" r:id="rId24"/>
+    <p:sldId id="274" r:id="rId25"/>
   </p:sldIdLst>
   <p:sldSz cx="12188952" cy="6858000" type="screen4x3"/>
   <p:notesSz cx="6858000" cy="9144000"/>
@@ -3383,7 +3385,7 @@
                   <a:srgbClr val="14141E"/>
                 </a:solidFill>
               </a:rPr>
-              <a:t>方針②：3つのプロンプト方式</a:t>
+              <a:t>研究目的：主目的と付随目的</a:t>
             </a:r>
           </a:p>
         </p:txBody>
@@ -3417,7 +3419,712 @@
                   <a:srgbClr val="1A56AA"/>
                 </a:solidFill>
               </a:rPr>
-              <a:t>10/17</a:t>
+              <a:t>10/19</a:t>
+            </a:r>
+          </a:p>
+        </p:txBody>
+      </p:sp>
+      <p:sp>
+        <p:nvSpPr>
+          <p:cNvPr id="5" name="Rectangle 4"/>
+          <p:cNvSpPr/>
+          <p:nvPr/>
+        </p:nvSpPr>
+        <p:spPr>
+          <a:xfrm>
+            <a:off x="548640" y="1691640"/>
+            <a:ext cx="11064240" cy="1828800"/>
+          </a:xfrm>
+          <a:prstGeom prst="rect">
+            <a:avLst/>
+          </a:prstGeom>
+          <a:solidFill>
+            <a:srgbClr val="ECF1F9"/>
+          </a:solidFill>
+          <a:ln>
+            <a:noFill/>
+          </a:ln>
+        </p:spPr>
+        <p:style>
+          <a:lnRef idx="1">
+            <a:schemeClr val="accent1"/>
+          </a:lnRef>
+          <a:fillRef idx="3">
+            <a:schemeClr val="accent1"/>
+          </a:fillRef>
+          <a:effectRef idx="2">
+            <a:schemeClr val="accent1"/>
+          </a:effectRef>
+          <a:fontRef idx="minor">
+            <a:schemeClr val="lt1"/>
+          </a:fontRef>
+        </p:style>
+        <p:txBody>
+          <a:bodyPr rtlCol="0" anchor="ctr"/>
+          <a:lstStyle/>
+          <a:p>
+            <a:pPr algn="ctr"/>
+          </a:p>
+        </p:txBody>
+      </p:sp>
+      <p:sp>
+        <p:nvSpPr>
+          <p:cNvPr id="6" name="TextBox 5"/>
+          <p:cNvSpPr txBox="1"/>
+          <p:nvPr/>
+        </p:nvSpPr>
+        <p:spPr>
+          <a:xfrm>
+            <a:off x="777240" y="1783080"/>
+            <a:ext cx="10607040" cy="457200"/>
+          </a:xfrm>
+          <a:prstGeom prst="rect">
+            <a:avLst/>
+          </a:prstGeom>
+          <a:noFill/>
+        </p:spPr>
+        <p:txBody>
+          <a:bodyPr wrap="square">
+            <a:spAutoFit/>
+          </a:bodyPr>
+          <a:lstStyle/>
+          <a:p>
+            <a:pPr algn="l"/>
+            <a:r>
+              <a:rPr sz="2600" b="1" i="0">
+                <a:solidFill>
+                  <a:srgbClr val="1A56AA"/>
+                </a:solidFill>
+              </a:rPr>
+              <a:t>主たる目的</a:t>
+            </a:r>
+          </a:p>
+        </p:txBody>
+      </p:sp>
+      <p:sp>
+        <p:nvSpPr>
+          <p:cNvPr id="7" name="TextBox 6"/>
+          <p:cNvSpPr txBox="1"/>
+          <p:nvPr/>
+        </p:nvSpPr>
+        <p:spPr>
+          <a:xfrm>
+            <a:off x="777240" y="2194560"/>
+            <a:ext cx="10607040" cy="1234440"/>
+          </a:xfrm>
+          <a:prstGeom prst="rect">
+            <a:avLst/>
+          </a:prstGeom>
+          <a:noFill/>
+        </p:spPr>
+        <p:txBody>
+          <a:bodyPr wrap="square">
+            <a:spAutoFit/>
+          </a:bodyPr>
+          <a:lstStyle/>
+          <a:p>
+            <a:pPr algn="l"/>
+            <a:r>
+              <a:rPr sz="2600" b="0" i="0">
+                <a:solidFill>
+                  <a:srgbClr val="14141E"/>
+                </a:solidFill>
+              </a:rPr>
+              <a:t>日本語タスクで確信度プロンプト方式（Verb.1S/Verb.2S/Ling.1S）の違いは
+較正精度（ECE・Brier Score）にどのような差をもたらすか？</a:t>
+            </a:r>
+          </a:p>
+        </p:txBody>
+      </p:sp>
+      <p:sp>
+        <p:nvSpPr>
+          <p:cNvPr id="8" name="Rectangle 7"/>
+          <p:cNvSpPr/>
+          <p:nvPr/>
+        </p:nvSpPr>
+        <p:spPr>
+          <a:xfrm>
+            <a:off x="548640" y="3703320"/>
+            <a:ext cx="11064240" cy="1554480"/>
+          </a:xfrm>
+          <a:prstGeom prst="rect">
+            <a:avLst/>
+          </a:prstGeom>
+          <a:solidFill>
+            <a:srgbClr val="FFFFFF"/>
+          </a:solidFill>
+          <a:ln w="12700">
+            <a:solidFill>
+              <a:srgbClr val="1A56AA"/>
+            </a:solidFill>
+          </a:ln>
+        </p:spPr>
+        <p:style>
+          <a:lnRef idx="1">
+            <a:schemeClr val="accent1"/>
+          </a:lnRef>
+          <a:fillRef idx="3">
+            <a:schemeClr val="accent1"/>
+          </a:fillRef>
+          <a:effectRef idx="2">
+            <a:schemeClr val="accent1"/>
+          </a:effectRef>
+          <a:fontRef idx="minor">
+            <a:schemeClr val="lt1"/>
+          </a:fontRef>
+        </p:style>
+        <p:txBody>
+          <a:bodyPr rtlCol="0" anchor="ctr"/>
+          <a:lstStyle/>
+          <a:p>
+            <a:pPr algn="ctr"/>
+          </a:p>
+        </p:txBody>
+      </p:sp>
+      <p:sp>
+        <p:nvSpPr>
+          <p:cNvPr id="9" name="TextBox 8"/>
+          <p:cNvSpPr txBox="1"/>
+          <p:nvPr/>
+        </p:nvSpPr>
+        <p:spPr>
+          <a:xfrm>
+            <a:off x="777240" y="3794760"/>
+            <a:ext cx="10607040" cy="457200"/>
+          </a:xfrm>
+          <a:prstGeom prst="rect">
+            <a:avLst/>
+          </a:prstGeom>
+          <a:noFill/>
+        </p:spPr>
+        <p:txBody>
+          <a:bodyPr wrap="square">
+            <a:spAutoFit/>
+          </a:bodyPr>
+          <a:lstStyle/>
+          <a:p>
+            <a:pPr algn="l"/>
+            <a:r>
+              <a:rPr sz="2600" b="1" i="0">
+                <a:solidFill>
+                  <a:srgbClr val="B02A1E"/>
+                </a:solidFill>
+              </a:rPr>
+              <a:t>付随して明らかになること</a:t>
+            </a:r>
+          </a:p>
+        </p:txBody>
+      </p:sp>
+      <p:sp>
+        <p:nvSpPr>
+          <p:cNvPr id="10" name="TextBox 9"/>
+          <p:cNvSpPr txBox="1"/>
+          <p:nvPr/>
+        </p:nvSpPr>
+        <p:spPr>
+          <a:xfrm>
+            <a:off x="777240" y="4206240"/>
+            <a:ext cx="10607040" cy="914400"/>
+          </a:xfrm>
+          <a:prstGeom prst="rect">
+            <a:avLst/>
+          </a:prstGeom>
+          <a:noFill/>
+        </p:spPr>
+        <p:txBody>
+          <a:bodyPr wrap="square">
+            <a:spAutoFit/>
+          </a:bodyPr>
+          <a:lstStyle/>
+          <a:p>
+            <a:pPr algn="l"/>
+            <a:r>
+              <a:rPr sz="2600" b="0" i="0">
+                <a:solidFill>
+                  <a:srgbClr val="14141E"/>
+                </a:solidFill>
+              </a:rPr>
+              <a:t>その効果は現行世代の商用LLMでも再現されるか？</a:t>
+            </a:r>
+          </a:p>
+        </p:txBody>
+      </p:sp>
+      <p:sp>
+        <p:nvSpPr>
+          <p:cNvPr id="11" name="Rectangle 10"/>
+          <p:cNvSpPr/>
+          <p:nvPr/>
+        </p:nvSpPr>
+        <p:spPr>
+          <a:xfrm>
+            <a:off x="0" y="6263640"/>
+            <a:ext cx="12188952" cy="594360"/>
+          </a:xfrm>
+          <a:prstGeom prst="rect">
+            <a:avLst/>
+          </a:prstGeom>
+          <a:solidFill>
+            <a:srgbClr val="ECF1F9"/>
+          </a:solidFill>
+          <a:ln>
+            <a:noFill/>
+          </a:ln>
+        </p:spPr>
+        <p:style>
+          <a:lnRef idx="1">
+            <a:schemeClr val="accent1"/>
+          </a:lnRef>
+          <a:fillRef idx="3">
+            <a:schemeClr val="accent1"/>
+          </a:fillRef>
+          <a:effectRef idx="2">
+            <a:schemeClr val="accent1"/>
+          </a:effectRef>
+          <a:fontRef idx="minor">
+            <a:schemeClr val="lt1"/>
+          </a:fontRef>
+        </p:style>
+        <p:txBody>
+          <a:bodyPr rtlCol="0" anchor="ctr"/>
+          <a:lstStyle/>
+          <a:p>
+            <a:pPr algn="ctr"/>
+          </a:p>
+        </p:txBody>
+      </p:sp>
+      <p:sp>
+        <p:nvSpPr>
+          <p:cNvPr id="12" name="TextBox 11"/>
+          <p:cNvSpPr txBox="1"/>
+          <p:nvPr/>
+        </p:nvSpPr>
+        <p:spPr>
+          <a:xfrm>
+            <a:off x="457200" y="6309360"/>
+            <a:ext cx="11247120" cy="502920"/>
+          </a:xfrm>
+          <a:prstGeom prst="rect">
+            <a:avLst/>
+          </a:prstGeom>
+          <a:noFill/>
+        </p:spPr>
+        <p:txBody>
+          <a:bodyPr wrap="square">
+            <a:spAutoFit/>
+          </a:bodyPr>
+          <a:lstStyle/>
+          <a:p>
+            <a:pPr algn="l"/>
+            <a:r>
+              <a:rPr sz="2400" b="0" i="1">
+                <a:solidFill>
+                  <a:srgbClr val="1A56AA"/>
+                </a:solidFill>
+              </a:rPr>
+              <a:t>1メッセージ：主目的（方式間の差）と付随目的（再現性）を分けて示す</a:t>
+            </a:r>
+          </a:p>
+        </p:txBody>
+      </p:sp>
+    </p:spTree>
+  </p:cSld>
+  <p:clrMapOvr>
+    <a:masterClrMapping/>
+  </p:clrMapOvr>
+</p:sld>
+</file>
+
+<file path=ppt/slides/slide11.xml><?xml version="1.0" encoding="utf-8"?>
+<p:sld xmlns:a="http://schemas.openxmlformats.org/drawingml/2006/main" xmlns:p="http://schemas.openxmlformats.org/presentationml/2006/main" xmlns:r="http://schemas.openxmlformats.org/officeDocument/2006/relationships">
+  <p:cSld>
+    <p:spTree>
+      <p:nvGrpSpPr>
+        <p:cNvPr id="1" name=""/>
+        <p:cNvGrpSpPr/>
+        <p:nvPr/>
+      </p:nvGrpSpPr>
+      <p:grpSpPr/>
+      <p:sp>
+        <p:nvSpPr>
+          <p:cNvPr id="2" name="Rectangle 1"/>
+          <p:cNvSpPr/>
+          <p:nvPr/>
+        </p:nvSpPr>
+        <p:spPr>
+          <a:xfrm>
+            <a:off x="0" y="0"/>
+            <a:ext cx="12188952" cy="109728"/>
+          </a:xfrm>
+          <a:prstGeom prst="rect">
+            <a:avLst/>
+          </a:prstGeom>
+          <a:solidFill>
+            <a:srgbClr val="1A56AA"/>
+          </a:solidFill>
+          <a:ln>
+            <a:noFill/>
+          </a:ln>
+        </p:spPr>
+        <p:style>
+          <a:lnRef idx="1">
+            <a:schemeClr val="accent1"/>
+          </a:lnRef>
+          <a:fillRef idx="3">
+            <a:schemeClr val="accent1"/>
+          </a:fillRef>
+          <a:effectRef idx="2">
+            <a:schemeClr val="accent1"/>
+          </a:effectRef>
+          <a:fontRef idx="minor">
+            <a:schemeClr val="lt1"/>
+          </a:fontRef>
+        </p:style>
+        <p:txBody>
+          <a:bodyPr rtlCol="0" anchor="ctr"/>
+          <a:lstStyle/>
+          <a:p>
+            <a:pPr algn="ctr"/>
+          </a:p>
+        </p:txBody>
+      </p:sp>
+      <p:sp>
+        <p:nvSpPr>
+          <p:cNvPr id="3" name="TextBox 2"/>
+          <p:cNvSpPr txBox="1"/>
+          <p:nvPr/>
+        </p:nvSpPr>
+        <p:spPr>
+          <a:xfrm>
+            <a:off x="457200" y="292608"/>
+            <a:ext cx="10332720" cy="822960"/>
+          </a:xfrm>
+          <a:prstGeom prst="rect">
+            <a:avLst/>
+          </a:prstGeom>
+          <a:noFill/>
+        </p:spPr>
+        <p:txBody>
+          <a:bodyPr wrap="square">
+            <a:spAutoFit/>
+          </a:bodyPr>
+          <a:lstStyle/>
+          <a:p>
+            <a:pPr algn="l"/>
+            <a:r>
+              <a:rPr sz="3200" b="1" i="0">
+                <a:solidFill>
+                  <a:srgbClr val="14141E"/>
+                </a:solidFill>
+              </a:rPr>
+              <a:t>方針①：実験の全体像</a:t>
+            </a:r>
+          </a:p>
+        </p:txBody>
+      </p:sp>
+      <p:sp>
+        <p:nvSpPr>
+          <p:cNvPr id="4" name="TextBox 3"/>
+          <p:cNvSpPr txBox="1"/>
+          <p:nvPr/>
+        </p:nvSpPr>
+        <p:spPr>
+          <a:xfrm>
+            <a:off x="10972800" y="292608"/>
+            <a:ext cx="1005840" cy="548640"/>
+          </a:xfrm>
+          <a:prstGeom prst="rect">
+            <a:avLst/>
+          </a:prstGeom>
+          <a:noFill/>
+        </p:spPr>
+        <p:txBody>
+          <a:bodyPr wrap="square">
+            <a:spAutoFit/>
+          </a:bodyPr>
+          <a:lstStyle/>
+          <a:p>
+            <a:pPr algn="r"/>
+            <a:r>
+              <a:rPr sz="2400" b="0" i="0">
+                <a:solidFill>
+                  <a:srgbClr val="1A56AA"/>
+                </a:solidFill>
+              </a:rPr>
+              <a:t>11/19</a:t>
+            </a:r>
+          </a:p>
+        </p:txBody>
+      </p:sp>
+      <p:sp>
+        <p:nvSpPr>
+          <p:cNvPr id="5" name="TextBox 4"/>
+          <p:cNvSpPr txBox="1"/>
+          <p:nvPr/>
+        </p:nvSpPr>
+        <p:spPr>
+          <a:xfrm>
+            <a:off x="731520" y="1737360"/>
+            <a:ext cx="10698480" cy="3291840"/>
+          </a:xfrm>
+          <a:prstGeom prst="rect">
+            <a:avLst/>
+          </a:prstGeom>
+          <a:noFill/>
+        </p:spPr>
+        <p:txBody>
+          <a:bodyPr wrap="square">
+            <a:spAutoFit/>
+          </a:bodyPr>
+          <a:lstStyle/>
+          <a:p>
+            <a:pPr>
+              <a:spcBef>
+                <a:spcPts val="1800"/>
+              </a:spcBef>
+            </a:pPr>
+            <a:r>
+              <a:rPr sz="2800">
+                <a:solidFill>
+                  <a:srgbClr val="14141E"/>
+                </a:solidFill>
+              </a:rPr>
+              <a:t>・モデル：GPT-4o／Claude Sonnet 4.6／Gemini 2.x／Swallow（4〜6モデル）</a:t>
+            </a:r>
+          </a:p>
+          <a:p>
+            <a:pPr>
+              <a:spcBef>
+                <a:spcPts val="1800"/>
+              </a:spcBef>
+            </a:pPr>
+            <a:r>
+              <a:rPr sz="2800">
+                <a:solidFill>
+                  <a:srgbClr val="14141E"/>
+                </a:solidFill>
+              </a:rPr>
+              <a:t>・データセット：日本語4ドメイン × 250問 ＝ 計1,000問</a:t>
+            </a:r>
+          </a:p>
+          <a:p>
+            <a:pPr>
+              <a:spcBef>
+                <a:spcPts val="1800"/>
+              </a:spcBef>
+            </a:pPr>
+            <a:r>
+              <a:rPr sz="2800">
+                <a:solidFill>
+                  <a:srgbClr val="14141E"/>
+                </a:solidFill>
+              </a:rPr>
+              <a:t>・3つのプロンプト方式を比較（詳細は次スライド）</a:t>
+            </a:r>
+          </a:p>
+        </p:txBody>
+      </p:sp>
+      <p:sp>
+        <p:nvSpPr>
+          <p:cNvPr id="6" name="Rectangle 5"/>
+          <p:cNvSpPr/>
+          <p:nvPr/>
+        </p:nvSpPr>
+        <p:spPr>
+          <a:xfrm>
+            <a:off x="0" y="6263640"/>
+            <a:ext cx="12188952" cy="594360"/>
+          </a:xfrm>
+          <a:prstGeom prst="rect">
+            <a:avLst/>
+          </a:prstGeom>
+          <a:solidFill>
+            <a:srgbClr val="ECF1F9"/>
+          </a:solidFill>
+          <a:ln>
+            <a:noFill/>
+          </a:ln>
+        </p:spPr>
+        <p:style>
+          <a:lnRef idx="1">
+            <a:schemeClr val="accent1"/>
+          </a:lnRef>
+          <a:fillRef idx="3">
+            <a:schemeClr val="accent1"/>
+          </a:fillRef>
+          <a:effectRef idx="2">
+            <a:schemeClr val="accent1"/>
+          </a:effectRef>
+          <a:fontRef idx="minor">
+            <a:schemeClr val="lt1"/>
+          </a:fontRef>
+        </p:style>
+        <p:txBody>
+          <a:bodyPr rtlCol="0" anchor="ctr"/>
+          <a:lstStyle/>
+          <a:p>
+            <a:pPr algn="ctr"/>
+          </a:p>
+        </p:txBody>
+      </p:sp>
+      <p:sp>
+        <p:nvSpPr>
+          <p:cNvPr id="7" name="TextBox 6"/>
+          <p:cNvSpPr txBox="1"/>
+          <p:nvPr/>
+        </p:nvSpPr>
+        <p:spPr>
+          <a:xfrm>
+            <a:off x="457200" y="6309360"/>
+            <a:ext cx="11247120" cy="502920"/>
+          </a:xfrm>
+          <a:prstGeom prst="rect">
+            <a:avLst/>
+          </a:prstGeom>
+          <a:noFill/>
+        </p:spPr>
+        <p:txBody>
+          <a:bodyPr wrap="square">
+            <a:spAutoFit/>
+          </a:bodyPr>
+          <a:lstStyle/>
+          <a:p>
+            <a:pPr algn="l"/>
+            <a:r>
+              <a:rPr sz="2400" b="0" i="1">
+                <a:solidFill>
+                  <a:srgbClr val="1A56AA"/>
+                </a:solidFill>
+              </a:rPr>
+              <a:t>1メッセージ：何を何で比較するかの全体像</a:t>
+            </a:r>
+          </a:p>
+        </p:txBody>
+      </p:sp>
+    </p:spTree>
+  </p:cSld>
+  <p:clrMapOvr>
+    <a:masterClrMapping/>
+  </p:clrMapOvr>
+</p:sld>
+</file>
+
+<file path=ppt/slides/slide12.xml><?xml version="1.0" encoding="utf-8"?>
+<p:sld xmlns:a="http://schemas.openxmlformats.org/drawingml/2006/main" xmlns:p="http://schemas.openxmlformats.org/presentationml/2006/main" xmlns:r="http://schemas.openxmlformats.org/officeDocument/2006/relationships">
+  <p:cSld>
+    <p:spTree>
+      <p:nvGrpSpPr>
+        <p:cNvPr id="1" name=""/>
+        <p:cNvGrpSpPr/>
+        <p:nvPr/>
+      </p:nvGrpSpPr>
+      <p:grpSpPr/>
+      <p:sp>
+        <p:nvSpPr>
+          <p:cNvPr id="2" name="Rectangle 1"/>
+          <p:cNvSpPr/>
+          <p:nvPr/>
+        </p:nvSpPr>
+        <p:spPr>
+          <a:xfrm>
+            <a:off x="0" y="0"/>
+            <a:ext cx="12188952" cy="109728"/>
+          </a:xfrm>
+          <a:prstGeom prst="rect">
+            <a:avLst/>
+          </a:prstGeom>
+          <a:solidFill>
+            <a:srgbClr val="1A56AA"/>
+          </a:solidFill>
+          <a:ln>
+            <a:noFill/>
+          </a:ln>
+        </p:spPr>
+        <p:style>
+          <a:lnRef idx="1">
+            <a:schemeClr val="accent1"/>
+          </a:lnRef>
+          <a:fillRef idx="3">
+            <a:schemeClr val="accent1"/>
+          </a:fillRef>
+          <a:effectRef idx="2">
+            <a:schemeClr val="accent1"/>
+          </a:effectRef>
+          <a:fontRef idx="minor">
+            <a:schemeClr val="lt1"/>
+          </a:fontRef>
+        </p:style>
+        <p:txBody>
+          <a:bodyPr rtlCol="0" anchor="ctr"/>
+          <a:lstStyle/>
+          <a:p>
+            <a:pPr algn="ctr"/>
+          </a:p>
+        </p:txBody>
+      </p:sp>
+      <p:sp>
+        <p:nvSpPr>
+          <p:cNvPr id="3" name="TextBox 2"/>
+          <p:cNvSpPr txBox="1"/>
+          <p:nvPr/>
+        </p:nvSpPr>
+        <p:spPr>
+          <a:xfrm>
+            <a:off x="457200" y="292608"/>
+            <a:ext cx="10332720" cy="822960"/>
+          </a:xfrm>
+          <a:prstGeom prst="rect">
+            <a:avLst/>
+          </a:prstGeom>
+          <a:noFill/>
+        </p:spPr>
+        <p:txBody>
+          <a:bodyPr wrap="square">
+            <a:spAutoFit/>
+          </a:bodyPr>
+          <a:lstStyle/>
+          <a:p>
+            <a:pPr algn="l"/>
+            <a:r>
+              <a:rPr sz="3200" b="1" i="0">
+                <a:solidFill>
+                  <a:srgbClr val="14141E"/>
+                </a:solidFill>
+              </a:rPr>
+              <a:t>方針②：3つのプロンプト方式</a:t>
+            </a:r>
+          </a:p>
+        </p:txBody>
+      </p:sp>
+      <p:sp>
+        <p:nvSpPr>
+          <p:cNvPr id="4" name="TextBox 3"/>
+          <p:cNvSpPr txBox="1"/>
+          <p:nvPr/>
+        </p:nvSpPr>
+        <p:spPr>
+          <a:xfrm>
+            <a:off x="10972800" y="292608"/>
+            <a:ext cx="1005840" cy="548640"/>
+          </a:xfrm>
+          <a:prstGeom prst="rect">
+            <a:avLst/>
+          </a:prstGeom>
+          <a:noFill/>
+        </p:spPr>
+        <p:txBody>
+          <a:bodyPr wrap="square">
+            <a:spAutoFit/>
+          </a:bodyPr>
+          <a:lstStyle/>
+          <a:p>
+            <a:pPr algn="r"/>
+            <a:r>
+              <a:rPr sz="2400" b="0" i="0">
+                <a:solidFill>
+                  <a:srgbClr val="1A56AA"/>
+                </a:solidFill>
+              </a:rPr>
+              <a:t>12/19</a:t>
             </a:r>
           </a:p>
         </p:txBody>
@@ -3711,7 +4418,7 @@
 </p:sld>
 </file>
 
-<file path=ppt/slides/slide11.xml><?xml version="1.0" encoding="utf-8"?>
+<file path=ppt/slides/slide13.xml><?xml version="1.0" encoding="utf-8"?>
 <p:sld xmlns:a="http://schemas.openxmlformats.org/drawingml/2006/main" xmlns:p="http://schemas.openxmlformats.org/presentationml/2006/main" xmlns:r="http://schemas.openxmlformats.org/officeDocument/2006/relationships">
   <p:cSld>
     <p:spTree>
@@ -3827,7 +4534,7 @@
                   <a:srgbClr val="1A56AA"/>
                 </a:solidFill>
               </a:rPr>
-              <a:t>11/17</a:t>
+              <a:t>13/19</a:t>
             </a:r>
           </a:p>
         </p:txBody>
@@ -3985,7 +4692,7 @@
 </p:sld>
 </file>
 
-<file path=ppt/slides/slide12.xml><?xml version="1.0" encoding="utf-8"?>
+<file path=ppt/slides/slide14.xml><?xml version="1.0" encoding="utf-8"?>
 <p:sld xmlns:a="http://schemas.openxmlformats.org/drawingml/2006/main" xmlns:p="http://schemas.openxmlformats.org/presentationml/2006/main" xmlns:r="http://schemas.openxmlformats.org/officeDocument/2006/relationships">
   <p:cSld>
     <p:spTree>
@@ -4101,7 +4808,7 @@
                   <a:srgbClr val="1A56AA"/>
                 </a:solidFill>
               </a:rPr>
-              <a:t>12/17</a:t>
+              <a:t>14/19</a:t>
             </a:r>
           </a:p>
         </p:txBody>
@@ -4483,554 +5190,6 @@
 </p:sld>
 </file>
 
-<file path=ppt/slides/slide13.xml><?xml version="1.0" encoding="utf-8"?>
-<p:sld xmlns:a="http://schemas.openxmlformats.org/drawingml/2006/main" xmlns:p="http://schemas.openxmlformats.org/presentationml/2006/main" xmlns:r="http://schemas.openxmlformats.org/officeDocument/2006/relationships">
-  <p:cSld>
-    <p:spTree>
-      <p:nvGrpSpPr>
-        <p:cNvPr id="1" name=""/>
-        <p:cNvGrpSpPr/>
-        <p:nvPr/>
-      </p:nvGrpSpPr>
-      <p:grpSpPr/>
-      <p:sp>
-        <p:nvSpPr>
-          <p:cNvPr id="2" name="Rectangle 1"/>
-          <p:cNvSpPr/>
-          <p:nvPr/>
-        </p:nvSpPr>
-        <p:spPr>
-          <a:xfrm>
-            <a:off x="0" y="0"/>
-            <a:ext cx="12188952" cy="109728"/>
-          </a:xfrm>
-          <a:prstGeom prst="rect">
-            <a:avLst/>
-          </a:prstGeom>
-          <a:solidFill>
-            <a:srgbClr val="1A56AA"/>
-          </a:solidFill>
-          <a:ln>
-            <a:noFill/>
-          </a:ln>
-        </p:spPr>
-        <p:style>
-          <a:lnRef idx="1">
-            <a:schemeClr val="accent1"/>
-          </a:lnRef>
-          <a:fillRef idx="3">
-            <a:schemeClr val="accent1"/>
-          </a:fillRef>
-          <a:effectRef idx="2">
-            <a:schemeClr val="accent1"/>
-          </a:effectRef>
-          <a:fontRef idx="minor">
-            <a:schemeClr val="lt1"/>
-          </a:fontRef>
-        </p:style>
-        <p:txBody>
-          <a:bodyPr rtlCol="0" anchor="ctr"/>
-          <a:lstStyle/>
-          <a:p>
-            <a:pPr algn="ctr"/>
-          </a:p>
-        </p:txBody>
-      </p:sp>
-      <p:sp>
-        <p:nvSpPr>
-          <p:cNvPr id="3" name="TextBox 2"/>
-          <p:cNvSpPr txBox="1"/>
-          <p:nvPr/>
-        </p:nvSpPr>
-        <p:spPr>
-          <a:xfrm>
-            <a:off x="457200" y="292608"/>
-            <a:ext cx="10332720" cy="822960"/>
-          </a:xfrm>
-          <a:prstGeom prst="rect">
-            <a:avLst/>
-          </a:prstGeom>
-          <a:noFill/>
-        </p:spPr>
-        <p:txBody>
-          <a:bodyPr wrap="square">
-            <a:spAutoFit/>
-          </a:bodyPr>
-          <a:lstStyle/>
-          <a:p>
-            <a:pPr algn="l"/>
-            <a:r>
-              <a:rPr sz="3200" b="1" i="0">
-                <a:solidFill>
-                  <a:srgbClr val="14141E"/>
-                </a:solidFill>
-              </a:rPr>
-              <a:t>検証仮説：自分はこう予想している</a:t>
-            </a:r>
-          </a:p>
-        </p:txBody>
-      </p:sp>
-      <p:sp>
-        <p:nvSpPr>
-          <p:cNvPr id="4" name="TextBox 3"/>
-          <p:cNvSpPr txBox="1"/>
-          <p:nvPr/>
-        </p:nvSpPr>
-        <p:spPr>
-          <a:xfrm>
-            <a:off x="10972800" y="292608"/>
-            <a:ext cx="1005840" cy="548640"/>
-          </a:xfrm>
-          <a:prstGeom prst="rect">
-            <a:avLst/>
-          </a:prstGeom>
-          <a:noFill/>
-        </p:spPr>
-        <p:txBody>
-          <a:bodyPr wrap="square">
-            <a:spAutoFit/>
-          </a:bodyPr>
-          <a:lstStyle/>
-          <a:p>
-            <a:pPr algn="r"/>
-            <a:r>
-              <a:rPr sz="2400" b="0" i="0">
-                <a:solidFill>
-                  <a:srgbClr val="1A56AA"/>
-                </a:solidFill>
-              </a:rPr>
-              <a:t>13/17</a:t>
-            </a:r>
-          </a:p>
-        </p:txBody>
-      </p:sp>
-      <p:sp>
-        <p:nvSpPr>
-          <p:cNvPr id="5" name="TextBox 4"/>
-          <p:cNvSpPr txBox="1"/>
-          <p:nvPr/>
-        </p:nvSpPr>
-        <p:spPr>
-          <a:xfrm>
-            <a:off x="731520" y="1737360"/>
-            <a:ext cx="10698480" cy="3291840"/>
-          </a:xfrm>
-          <a:prstGeom prst="rect">
-            <a:avLst/>
-          </a:prstGeom>
-          <a:noFill/>
-        </p:spPr>
-        <p:txBody>
-          <a:bodyPr wrap="square">
-            <a:spAutoFit/>
-          </a:bodyPr>
-          <a:lstStyle/>
-          <a:p>
-            <a:pPr>
-              <a:spcBef>
-                <a:spcPts val="1600"/>
-              </a:spcBef>
-            </a:pPr>
-            <a:r>
-              <a:rPr sz="2600">
-                <a:solidFill>
-                  <a:srgbClr val="14141E"/>
-                </a:solidFill>
-              </a:rPr>
-              <a:t>・H1：Verb.2Sは回答後に確信度を聞く分，Verb.1SよりECEが改善すると予想</a:t>
-            </a:r>
-          </a:p>
-          <a:p>
-            <a:pPr>
-              <a:spcBef>
-                <a:spcPts val="1600"/>
-              </a:spcBef>
-            </a:pPr>
-            <a:r>
-              <a:rPr sz="2600">
-                <a:solidFill>
-                  <a:srgbClr val="14141E"/>
-                </a:solidFill>
-              </a:rPr>
-              <a:t>・H2：Ling.1Sは情報を圧縮するため，数値表現方式より改善幅が小さいと予想</a:t>
-            </a:r>
-          </a:p>
-          <a:p>
-            <a:pPr>
-              <a:spcBef>
-                <a:spcPts val="1600"/>
-              </a:spcBef>
-            </a:pPr>
-            <a:r>
-              <a:rPr sz="2600">
-                <a:solidFill>
-                  <a:srgbClr val="14141E"/>
-                </a:solidFill>
-              </a:rPr>
-              <a:t>・H3：改善幅はタスクドメインにより異なると予想（正答率分布の違いのため）</a:t>
-            </a:r>
-          </a:p>
-        </p:txBody>
-      </p:sp>
-      <p:sp>
-        <p:nvSpPr>
-          <p:cNvPr id="6" name="Rectangle 5"/>
-          <p:cNvSpPr/>
-          <p:nvPr/>
-        </p:nvSpPr>
-        <p:spPr>
-          <a:xfrm>
-            <a:off x="0" y="6263640"/>
-            <a:ext cx="12188952" cy="594360"/>
-          </a:xfrm>
-          <a:prstGeom prst="rect">
-            <a:avLst/>
-          </a:prstGeom>
-          <a:solidFill>
-            <a:srgbClr val="ECF1F9"/>
-          </a:solidFill>
-          <a:ln>
-            <a:noFill/>
-          </a:ln>
-        </p:spPr>
-        <p:style>
-          <a:lnRef idx="1">
-            <a:schemeClr val="accent1"/>
-          </a:lnRef>
-          <a:fillRef idx="3">
-            <a:schemeClr val="accent1"/>
-          </a:fillRef>
-          <a:effectRef idx="2">
-            <a:schemeClr val="accent1"/>
-          </a:effectRef>
-          <a:fontRef idx="minor">
-            <a:schemeClr val="lt1"/>
-          </a:fontRef>
-        </p:style>
-        <p:txBody>
-          <a:bodyPr rtlCol="0" anchor="ctr"/>
-          <a:lstStyle/>
-          <a:p>
-            <a:pPr algn="ctr"/>
-          </a:p>
-        </p:txBody>
-      </p:sp>
-      <p:sp>
-        <p:nvSpPr>
-          <p:cNvPr id="7" name="TextBox 6"/>
-          <p:cNvSpPr txBox="1"/>
-          <p:nvPr/>
-        </p:nvSpPr>
-        <p:spPr>
-          <a:xfrm>
-            <a:off x="457200" y="6309360"/>
-            <a:ext cx="11247120" cy="502920"/>
-          </a:xfrm>
-          <a:prstGeom prst="rect">
-            <a:avLst/>
-          </a:prstGeom>
-          <a:noFill/>
-        </p:spPr>
-        <p:txBody>
-          <a:bodyPr wrap="square">
-            <a:spAutoFit/>
-          </a:bodyPr>
-          <a:lstStyle/>
-          <a:p>
-            <a:pPr algn="l"/>
-            <a:r>
-              <a:rPr sz="2400" b="0" i="1">
-                <a:solidFill>
-                  <a:srgbClr val="1A56AA"/>
-                </a:solidFill>
-              </a:rPr>
-              <a:t>1メッセージ：3つの予想とその理由（H4は質疑対応のAppendixへ）</a:t>
-            </a:r>
-          </a:p>
-        </p:txBody>
-      </p:sp>
-    </p:spTree>
-  </p:cSld>
-  <p:clrMapOvr>
-    <a:masterClrMapping/>
-  </p:clrMapOvr>
-</p:sld>
-</file>
-
-<file path=ppt/slides/slide14.xml><?xml version="1.0" encoding="utf-8"?>
-<p:sld xmlns:a="http://schemas.openxmlformats.org/drawingml/2006/main" xmlns:p="http://schemas.openxmlformats.org/presentationml/2006/main" xmlns:r="http://schemas.openxmlformats.org/officeDocument/2006/relationships">
-  <p:cSld>
-    <p:spTree>
-      <p:nvGrpSpPr>
-        <p:cNvPr id="1" name=""/>
-        <p:cNvGrpSpPr/>
-        <p:nvPr/>
-      </p:nvGrpSpPr>
-      <p:grpSpPr/>
-      <p:sp>
-        <p:nvSpPr>
-          <p:cNvPr id="2" name="Rectangle 1"/>
-          <p:cNvSpPr/>
-          <p:nvPr/>
-        </p:nvSpPr>
-        <p:spPr>
-          <a:xfrm>
-            <a:off x="0" y="0"/>
-            <a:ext cx="12188952" cy="109728"/>
-          </a:xfrm>
-          <a:prstGeom prst="rect">
-            <a:avLst/>
-          </a:prstGeom>
-          <a:solidFill>
-            <a:srgbClr val="1A56AA"/>
-          </a:solidFill>
-          <a:ln>
-            <a:noFill/>
-          </a:ln>
-        </p:spPr>
-        <p:style>
-          <a:lnRef idx="1">
-            <a:schemeClr val="accent1"/>
-          </a:lnRef>
-          <a:fillRef idx="3">
-            <a:schemeClr val="accent1"/>
-          </a:fillRef>
-          <a:effectRef idx="2">
-            <a:schemeClr val="accent1"/>
-          </a:effectRef>
-          <a:fontRef idx="minor">
-            <a:schemeClr val="lt1"/>
-          </a:fontRef>
-        </p:style>
-        <p:txBody>
-          <a:bodyPr rtlCol="0" anchor="ctr"/>
-          <a:lstStyle/>
-          <a:p>
-            <a:pPr algn="ctr"/>
-          </a:p>
-        </p:txBody>
-      </p:sp>
-      <p:sp>
-        <p:nvSpPr>
-          <p:cNvPr id="3" name="TextBox 2"/>
-          <p:cNvSpPr txBox="1"/>
-          <p:nvPr/>
-        </p:nvSpPr>
-        <p:spPr>
-          <a:xfrm>
-            <a:off x="457200" y="292608"/>
-            <a:ext cx="10332720" cy="822960"/>
-          </a:xfrm>
-          <a:prstGeom prst="rect">
-            <a:avLst/>
-          </a:prstGeom>
-          <a:noFill/>
-        </p:spPr>
-        <p:txBody>
-          <a:bodyPr wrap="square">
-            <a:spAutoFit/>
-          </a:bodyPr>
-          <a:lstStyle/>
-          <a:p>
-            <a:pPr algn="l"/>
-            <a:r>
-              <a:rPr sz="3200" b="1" i="0">
-                <a:solidFill>
-                  <a:srgbClr val="14141E"/>
-                </a:solidFill>
-              </a:rPr>
-              <a:t>現在の進捗</a:t>
-            </a:r>
-          </a:p>
-        </p:txBody>
-      </p:sp>
-      <p:sp>
-        <p:nvSpPr>
-          <p:cNvPr id="4" name="TextBox 3"/>
-          <p:cNvSpPr txBox="1"/>
-          <p:nvPr/>
-        </p:nvSpPr>
-        <p:spPr>
-          <a:xfrm>
-            <a:off x="10972800" y="292608"/>
-            <a:ext cx="1005840" cy="548640"/>
-          </a:xfrm>
-          <a:prstGeom prst="rect">
-            <a:avLst/>
-          </a:prstGeom>
-          <a:noFill/>
-        </p:spPr>
-        <p:txBody>
-          <a:bodyPr wrap="square">
-            <a:spAutoFit/>
-          </a:bodyPr>
-          <a:lstStyle/>
-          <a:p>
-            <a:pPr algn="r"/>
-            <a:r>
-              <a:rPr sz="2400" b="0" i="0">
-                <a:solidFill>
-                  <a:srgbClr val="1A56AA"/>
-                </a:solidFill>
-              </a:rPr>
-              <a:t>14/17</a:t>
-            </a:r>
-          </a:p>
-        </p:txBody>
-      </p:sp>
-      <p:sp>
-        <p:nvSpPr>
-          <p:cNvPr id="5" name="TextBox 4"/>
-          <p:cNvSpPr txBox="1"/>
-          <p:nvPr/>
-        </p:nvSpPr>
-        <p:spPr>
-          <a:xfrm>
-            <a:off x="731520" y="1737360"/>
-            <a:ext cx="10698480" cy="3291840"/>
-          </a:xfrm>
-          <a:prstGeom prst="rect">
-            <a:avLst/>
-          </a:prstGeom>
-          <a:noFill/>
-        </p:spPr>
-        <p:txBody>
-          <a:bodyPr wrap="square">
-            <a:spAutoFit/>
-          </a:bodyPr>
-          <a:lstStyle/>
-          <a:p>
-            <a:pPr>
-              <a:spcBef>
-                <a:spcPts val="1600"/>
-              </a:spcBef>
-            </a:pPr>
-            <a:r>
-              <a:rPr sz="2600">
-                <a:solidFill>
-                  <a:srgbClr val="14141E"/>
-                </a:solidFill>
-              </a:rPr>
-              <a:t>・プロンプト3方式×4ドメインのテンプレートと確信度の解析処理を実装済み</a:t>
-            </a:r>
-          </a:p>
-          <a:p>
-            <a:pPr>
-              <a:spcBef>
-                <a:spcPts val="1600"/>
-              </a:spcBef>
-            </a:pPr>
-            <a:r>
-              <a:rPr sz="2600">
-                <a:solidFill>
-                  <a:srgbClr val="14141E"/>
-                </a:solidFill>
-              </a:rPr>
-              <a:t>・ECE・Brier Score・AUROCの計算コードを実装し，数値的に検証済み</a:t>
-            </a:r>
-          </a:p>
-          <a:p>
-            <a:pPr>
-              <a:spcBef>
-                <a:spcPts val="1600"/>
-              </a:spcBef>
-            </a:pPr>
-            <a:r>
-              <a:rPr sz="2600">
-                <a:solidFill>
-                  <a:srgbClr val="14141E"/>
-                </a:solidFill>
-              </a:rPr>
-              <a:t>・先行研究の再調査によりMlingConfとの違いを精緻化済み</a:t>
-            </a:r>
-          </a:p>
-        </p:txBody>
-      </p:sp>
-      <p:sp>
-        <p:nvSpPr>
-          <p:cNvPr id="6" name="Rectangle 5"/>
-          <p:cNvSpPr/>
-          <p:nvPr/>
-        </p:nvSpPr>
-        <p:spPr>
-          <a:xfrm>
-            <a:off x="0" y="6263640"/>
-            <a:ext cx="12188952" cy="594360"/>
-          </a:xfrm>
-          <a:prstGeom prst="rect">
-            <a:avLst/>
-          </a:prstGeom>
-          <a:solidFill>
-            <a:srgbClr val="ECF1F9"/>
-          </a:solidFill>
-          <a:ln>
-            <a:noFill/>
-          </a:ln>
-        </p:spPr>
-        <p:style>
-          <a:lnRef idx="1">
-            <a:schemeClr val="accent1"/>
-          </a:lnRef>
-          <a:fillRef idx="3">
-            <a:schemeClr val="accent1"/>
-          </a:fillRef>
-          <a:effectRef idx="2">
-            <a:schemeClr val="accent1"/>
-          </a:effectRef>
-          <a:fontRef idx="minor">
-            <a:schemeClr val="lt1"/>
-          </a:fontRef>
-        </p:style>
-        <p:txBody>
-          <a:bodyPr rtlCol="0" anchor="ctr"/>
-          <a:lstStyle/>
-          <a:p>
-            <a:pPr algn="ctr"/>
-          </a:p>
-        </p:txBody>
-      </p:sp>
-      <p:sp>
-        <p:nvSpPr>
-          <p:cNvPr id="7" name="TextBox 6"/>
-          <p:cNvSpPr txBox="1"/>
-          <p:nvPr/>
-        </p:nvSpPr>
-        <p:spPr>
-          <a:xfrm>
-            <a:off x="457200" y="6309360"/>
-            <a:ext cx="11247120" cy="502920"/>
-          </a:xfrm>
-          <a:prstGeom prst="rect">
-            <a:avLst/>
-          </a:prstGeom>
-          <a:noFill/>
-        </p:spPr>
-        <p:txBody>
-          <a:bodyPr wrap="square">
-            <a:spAutoFit/>
-          </a:bodyPr>
-          <a:lstStyle/>
-          <a:p>
-            <a:pPr algn="l"/>
-            <a:r>
-              <a:rPr sz="2400" b="0" i="1">
-                <a:solidFill>
-                  <a:srgbClr val="1A56AA"/>
-                </a:solidFill>
-              </a:rPr>
-              <a:t>1メッセージ：準備は終わっている，実行はこれから</a:t>
-            </a:r>
-          </a:p>
-        </p:txBody>
-      </p:sp>
-    </p:spTree>
-  </p:cSld>
-  <p:clrMapOvr>
-    <a:masterClrMapping/>
-  </p:clrMapOvr>
-</p:sld>
-</file>
-
 <file path=ppt/slides/slide15.xml><?xml version="1.0" encoding="utf-8"?>
 <p:sld xmlns:a="http://schemas.openxmlformats.org/drawingml/2006/main" xmlns:p="http://schemas.openxmlformats.org/presentationml/2006/main" xmlns:r="http://schemas.openxmlformats.org/officeDocument/2006/relationships">
   <p:cSld>
@@ -5113,7 +5272,7 @@
                   <a:srgbClr val="14141E"/>
                 </a:solidFill>
               </a:rPr>
-              <a:t>今後の予定</a:t>
+              <a:t>検証仮説：自分はこう予想している</a:t>
             </a:r>
           </a:p>
         </p:txBody>
@@ -5147,7 +5306,7 @@
                   <a:srgbClr val="1A56AA"/>
                 </a:solidFill>
               </a:rPr>
-              <a:t>15/17</a:t>
+              <a:t>15/19</a:t>
             </a:r>
           </a:p>
         </p:txBody>
@@ -5176,46 +5335,46 @@
           <a:p>
             <a:pPr>
               <a:spcBef>
-                <a:spcPts val="1800"/>
+                <a:spcPts val="1600"/>
               </a:spcBef>
             </a:pPr>
             <a:r>
-              <a:rPr sz="2800">
+              <a:rPr sz="2600">
                 <a:solidFill>
                   <a:srgbClr val="14141E"/>
                 </a:solidFill>
               </a:rPr>
-              <a:t>・パイロット実験でスクリプトの動作確認</a:t>
+              <a:t>・H1：Verb.2Sは回答後に確信度を聞く分，Verb.1SよりECEが改善すると予想</a:t>
             </a:r>
           </a:p>
           <a:p>
             <a:pPr>
               <a:spcBef>
-                <a:spcPts val="1800"/>
+                <a:spcPts val="1600"/>
               </a:spcBef>
             </a:pPr>
             <a:r>
-              <a:rPr sz="2800">
+              <a:rPr sz="2600">
                 <a:solidFill>
                   <a:srgbClr val="14141E"/>
                 </a:solidFill>
               </a:rPr>
-              <a:t>・問題なければ複数モデル×3方式×大規模な問題数で本実験を実施</a:t>
+              <a:t>・H2：Ling.1Sは情報を圧縮するため，数値表現方式より改善幅が小さいと予想</a:t>
             </a:r>
           </a:p>
           <a:p>
             <a:pPr>
               <a:spcBef>
-                <a:spcPts val="1800"/>
+                <a:spcPts val="1600"/>
               </a:spcBef>
             </a:pPr>
             <a:r>
-              <a:rPr sz="2800">
+              <a:rPr sz="2600">
                 <a:solidFill>
                   <a:srgbClr val="14141E"/>
                 </a:solidFill>
               </a:rPr>
-              <a:t>・結果はどのパターンでも報告可能な形で整理する方針</a:t>
+              <a:t>・H3：改善幅はタスクドメインにより異なると予想（正答率分布の違いのため）</a:t>
             </a:r>
           </a:p>
         </p:txBody>
@@ -5292,7 +5451,7 @@
                   <a:srgbClr val="1A56AA"/>
                 </a:solidFill>
               </a:rPr>
-              <a:t>1メッセージ：次に何をするか</a:t>
+              <a:t>1メッセージ：3つの予想とその理由（H4は質疑対応のAppendixへ）</a:t>
             </a:r>
           </a:p>
         </p:txBody>
@@ -5387,7 +5546,7 @@
                   <a:srgbClr val="14141E"/>
                 </a:solidFill>
               </a:rPr>
-              <a:t>参考文献</a:t>
+              <a:t>現在の進捗</a:t>
             </a:r>
           </a:p>
         </p:txBody>
@@ -5421,7 +5580,7 @@
                   <a:srgbClr val="1A56AA"/>
                 </a:solidFill>
               </a:rPr>
-              <a:t>16/17</a:t>
+              <a:t>16/19</a:t>
             </a:r>
           </a:p>
         </p:txBody>
@@ -5434,8 +5593,8 @@
         </p:nvSpPr>
         <p:spPr>
           <a:xfrm>
-            <a:off x="731520" y="3931920"/>
-            <a:ext cx="10698480" cy="2560320"/>
+            <a:off x="731520" y="1737360"/>
+            <a:ext cx="10698480" cy="3291840"/>
           </a:xfrm>
           <a:prstGeom prst="rect">
             <a:avLst/>
@@ -5448,19 +5607,125 @@
           </a:bodyPr>
           <a:lstStyle/>
           <a:p>
+            <a:pPr>
+              <a:spcBef>
+                <a:spcPts val="1600"/>
+              </a:spcBef>
+            </a:pPr>
+            <a:r>
+              <a:rPr sz="2600">
+                <a:solidFill>
+                  <a:srgbClr val="14141E"/>
+                </a:solidFill>
+              </a:rPr>
+              <a:t>・プロンプト3方式×4ドメインのテンプレートと確信度の解析処理を実装済み</a:t>
+            </a:r>
+          </a:p>
+          <a:p>
+            <a:pPr>
+              <a:spcBef>
+                <a:spcPts val="1600"/>
+              </a:spcBef>
+            </a:pPr>
+            <a:r>
+              <a:rPr sz="2600">
+                <a:solidFill>
+                  <a:srgbClr val="14141E"/>
+                </a:solidFill>
+              </a:rPr>
+              <a:t>・ECE・Brier Score・AUROCの計算コードを実装し，数値的に検証済み</a:t>
+            </a:r>
+          </a:p>
+          <a:p>
+            <a:pPr>
+              <a:spcBef>
+                <a:spcPts val="1600"/>
+              </a:spcBef>
+            </a:pPr>
+            <a:r>
+              <a:rPr sz="2600">
+                <a:solidFill>
+                  <a:srgbClr val="14141E"/>
+                </a:solidFill>
+              </a:rPr>
+              <a:t>・先行研究の再調査によりMlingConfとの違いを精緻化済み</a:t>
+            </a:r>
+          </a:p>
+        </p:txBody>
+      </p:sp>
+      <p:sp>
+        <p:nvSpPr>
+          <p:cNvPr id="6" name="Rectangle 5"/>
+          <p:cNvSpPr/>
+          <p:nvPr/>
+        </p:nvSpPr>
+        <p:spPr>
+          <a:xfrm>
+            <a:off x="0" y="6263640"/>
+            <a:ext cx="12188952" cy="594360"/>
+          </a:xfrm>
+          <a:prstGeom prst="rect">
+            <a:avLst/>
+          </a:prstGeom>
+          <a:solidFill>
+            <a:srgbClr val="ECF1F9"/>
+          </a:solidFill>
+          <a:ln>
+            <a:noFill/>
+          </a:ln>
+        </p:spPr>
+        <p:style>
+          <a:lnRef idx="1">
+            <a:schemeClr val="accent1"/>
+          </a:lnRef>
+          <a:fillRef idx="3">
+            <a:schemeClr val="accent1"/>
+          </a:fillRef>
+          <a:effectRef idx="2">
+            <a:schemeClr val="accent1"/>
+          </a:effectRef>
+          <a:fontRef idx="minor">
+            <a:schemeClr val="lt1"/>
+          </a:fontRef>
+        </p:style>
+        <p:txBody>
+          <a:bodyPr rtlCol="0" anchor="ctr"/>
+          <a:lstStyle/>
+          <a:p>
+            <a:pPr algn="ctr"/>
+          </a:p>
+        </p:txBody>
+      </p:sp>
+      <p:sp>
+        <p:nvSpPr>
+          <p:cNvPr id="7" name="TextBox 6"/>
+          <p:cNvSpPr txBox="1"/>
+          <p:nvPr/>
+        </p:nvSpPr>
+        <p:spPr>
+          <a:xfrm>
+            <a:off x="457200" y="6309360"/>
+            <a:ext cx="11247120" cy="502920"/>
+          </a:xfrm>
+          <a:prstGeom prst="rect">
+            <a:avLst/>
+          </a:prstGeom>
+          <a:noFill/>
+        </p:spPr>
+        <p:txBody>
+          <a:bodyPr wrap="square">
+            <a:spAutoFit/>
+          </a:bodyPr>
+          <a:lstStyle/>
+          <a:p>
             <a:pPr algn="l"/>
             <a:r>
-              <a:rPr sz="2400" b="0" i="0">
-                <a:solidFill>
-                  <a:srgbClr val="14141E"/>
-                </a:solidFill>
-              </a:rPr>
-              <a:t>Guo et al. (2017) ICML
-Tian et al. (2023) EMNLP
-Xiong et al. (2024) ICLR
-Xue et al. (2025) ACL Findings（MlingConf）
-Xie et al. (2024) arXiv（Black-Box Calibration Survey）
-Murphy (1973) / Bröcker (2009) / Ferro &amp; Fricker (2012)</a:t>
+              <a:rPr sz="2400" b="0" i="1">
+                <a:solidFill>
+                  <a:srgbClr val="1A56AA"/>
+                </a:solidFill>
+              </a:rPr>
+              <a:t>1メッセージ：準備は終わっている，実行はこれから</a:t>
             </a:r>
           </a:p>
         </p:txBody>
@@ -5555,7 +5820,7 @@
                   <a:srgbClr val="14141E"/>
                 </a:solidFill>
               </a:rPr>
-              <a:t>まとめ</a:t>
+              <a:t>今後の予定</a:t>
             </a:r>
           </a:p>
         </p:txBody>
@@ -5589,7 +5854,449 @@
                   <a:srgbClr val="1A56AA"/>
                 </a:solidFill>
               </a:rPr>
-              <a:t>17/17</a:t>
+              <a:t>17/19</a:t>
+            </a:r>
+          </a:p>
+        </p:txBody>
+      </p:sp>
+      <p:sp>
+        <p:nvSpPr>
+          <p:cNvPr id="5" name="TextBox 4"/>
+          <p:cNvSpPr txBox="1"/>
+          <p:nvPr/>
+        </p:nvSpPr>
+        <p:spPr>
+          <a:xfrm>
+            <a:off x="731520" y="1737360"/>
+            <a:ext cx="10698480" cy="3291840"/>
+          </a:xfrm>
+          <a:prstGeom prst="rect">
+            <a:avLst/>
+          </a:prstGeom>
+          <a:noFill/>
+        </p:spPr>
+        <p:txBody>
+          <a:bodyPr wrap="square">
+            <a:spAutoFit/>
+          </a:bodyPr>
+          <a:lstStyle/>
+          <a:p>
+            <a:pPr>
+              <a:spcBef>
+                <a:spcPts val="1800"/>
+              </a:spcBef>
+            </a:pPr>
+            <a:r>
+              <a:rPr sz="2800">
+                <a:solidFill>
+                  <a:srgbClr val="14141E"/>
+                </a:solidFill>
+              </a:rPr>
+              <a:t>・パイロット実験でスクリプトの動作確認</a:t>
+            </a:r>
+          </a:p>
+          <a:p>
+            <a:pPr>
+              <a:spcBef>
+                <a:spcPts val="1800"/>
+              </a:spcBef>
+            </a:pPr>
+            <a:r>
+              <a:rPr sz="2800">
+                <a:solidFill>
+                  <a:srgbClr val="14141E"/>
+                </a:solidFill>
+              </a:rPr>
+              <a:t>・問題なければ複数モデル×3方式×大規模な問題数で本実験を実施</a:t>
+            </a:r>
+          </a:p>
+          <a:p>
+            <a:pPr>
+              <a:spcBef>
+                <a:spcPts val="1800"/>
+              </a:spcBef>
+            </a:pPr>
+            <a:r>
+              <a:rPr sz="2800">
+                <a:solidFill>
+                  <a:srgbClr val="14141E"/>
+                </a:solidFill>
+              </a:rPr>
+              <a:t>・結果はどのパターンでも報告可能な形で整理する方針</a:t>
+            </a:r>
+          </a:p>
+        </p:txBody>
+      </p:sp>
+      <p:sp>
+        <p:nvSpPr>
+          <p:cNvPr id="6" name="Rectangle 5"/>
+          <p:cNvSpPr/>
+          <p:nvPr/>
+        </p:nvSpPr>
+        <p:spPr>
+          <a:xfrm>
+            <a:off x="0" y="6263640"/>
+            <a:ext cx="12188952" cy="594360"/>
+          </a:xfrm>
+          <a:prstGeom prst="rect">
+            <a:avLst/>
+          </a:prstGeom>
+          <a:solidFill>
+            <a:srgbClr val="ECF1F9"/>
+          </a:solidFill>
+          <a:ln>
+            <a:noFill/>
+          </a:ln>
+        </p:spPr>
+        <p:style>
+          <a:lnRef idx="1">
+            <a:schemeClr val="accent1"/>
+          </a:lnRef>
+          <a:fillRef idx="3">
+            <a:schemeClr val="accent1"/>
+          </a:fillRef>
+          <a:effectRef idx="2">
+            <a:schemeClr val="accent1"/>
+          </a:effectRef>
+          <a:fontRef idx="minor">
+            <a:schemeClr val="lt1"/>
+          </a:fontRef>
+        </p:style>
+        <p:txBody>
+          <a:bodyPr rtlCol="0" anchor="ctr"/>
+          <a:lstStyle/>
+          <a:p>
+            <a:pPr algn="ctr"/>
+          </a:p>
+        </p:txBody>
+      </p:sp>
+      <p:sp>
+        <p:nvSpPr>
+          <p:cNvPr id="7" name="TextBox 6"/>
+          <p:cNvSpPr txBox="1"/>
+          <p:nvPr/>
+        </p:nvSpPr>
+        <p:spPr>
+          <a:xfrm>
+            <a:off x="457200" y="6309360"/>
+            <a:ext cx="11247120" cy="502920"/>
+          </a:xfrm>
+          <a:prstGeom prst="rect">
+            <a:avLst/>
+          </a:prstGeom>
+          <a:noFill/>
+        </p:spPr>
+        <p:txBody>
+          <a:bodyPr wrap="square">
+            <a:spAutoFit/>
+          </a:bodyPr>
+          <a:lstStyle/>
+          <a:p>
+            <a:pPr algn="l"/>
+            <a:r>
+              <a:rPr sz="2400" b="0" i="1">
+                <a:solidFill>
+                  <a:srgbClr val="1A56AA"/>
+                </a:solidFill>
+              </a:rPr>
+              <a:t>1メッセージ：次に何をするか</a:t>
+            </a:r>
+          </a:p>
+        </p:txBody>
+      </p:sp>
+    </p:spTree>
+  </p:cSld>
+  <p:clrMapOvr>
+    <a:masterClrMapping/>
+  </p:clrMapOvr>
+</p:sld>
+</file>
+
+<file path=ppt/slides/slide18.xml><?xml version="1.0" encoding="utf-8"?>
+<p:sld xmlns:a="http://schemas.openxmlformats.org/drawingml/2006/main" xmlns:p="http://schemas.openxmlformats.org/presentationml/2006/main" xmlns:r="http://schemas.openxmlformats.org/officeDocument/2006/relationships">
+  <p:cSld>
+    <p:spTree>
+      <p:nvGrpSpPr>
+        <p:cNvPr id="1" name=""/>
+        <p:cNvGrpSpPr/>
+        <p:nvPr/>
+      </p:nvGrpSpPr>
+      <p:grpSpPr/>
+      <p:sp>
+        <p:nvSpPr>
+          <p:cNvPr id="2" name="Rectangle 1"/>
+          <p:cNvSpPr/>
+          <p:nvPr/>
+        </p:nvSpPr>
+        <p:spPr>
+          <a:xfrm>
+            <a:off x="0" y="0"/>
+            <a:ext cx="12188952" cy="109728"/>
+          </a:xfrm>
+          <a:prstGeom prst="rect">
+            <a:avLst/>
+          </a:prstGeom>
+          <a:solidFill>
+            <a:srgbClr val="1A56AA"/>
+          </a:solidFill>
+          <a:ln>
+            <a:noFill/>
+          </a:ln>
+        </p:spPr>
+        <p:style>
+          <a:lnRef idx="1">
+            <a:schemeClr val="accent1"/>
+          </a:lnRef>
+          <a:fillRef idx="3">
+            <a:schemeClr val="accent1"/>
+          </a:fillRef>
+          <a:effectRef idx="2">
+            <a:schemeClr val="accent1"/>
+          </a:effectRef>
+          <a:fontRef idx="minor">
+            <a:schemeClr val="lt1"/>
+          </a:fontRef>
+        </p:style>
+        <p:txBody>
+          <a:bodyPr rtlCol="0" anchor="ctr"/>
+          <a:lstStyle/>
+          <a:p>
+            <a:pPr algn="ctr"/>
+          </a:p>
+        </p:txBody>
+      </p:sp>
+      <p:sp>
+        <p:nvSpPr>
+          <p:cNvPr id="3" name="TextBox 2"/>
+          <p:cNvSpPr txBox="1"/>
+          <p:nvPr/>
+        </p:nvSpPr>
+        <p:spPr>
+          <a:xfrm>
+            <a:off x="457200" y="292608"/>
+            <a:ext cx="10332720" cy="822960"/>
+          </a:xfrm>
+          <a:prstGeom prst="rect">
+            <a:avLst/>
+          </a:prstGeom>
+          <a:noFill/>
+        </p:spPr>
+        <p:txBody>
+          <a:bodyPr wrap="square">
+            <a:spAutoFit/>
+          </a:bodyPr>
+          <a:lstStyle/>
+          <a:p>
+            <a:pPr algn="l"/>
+            <a:r>
+              <a:rPr sz="3200" b="1" i="0">
+                <a:solidFill>
+                  <a:srgbClr val="14141E"/>
+                </a:solidFill>
+              </a:rPr>
+              <a:t>参考文献</a:t>
+            </a:r>
+          </a:p>
+        </p:txBody>
+      </p:sp>
+      <p:sp>
+        <p:nvSpPr>
+          <p:cNvPr id="4" name="TextBox 3"/>
+          <p:cNvSpPr txBox="1"/>
+          <p:nvPr/>
+        </p:nvSpPr>
+        <p:spPr>
+          <a:xfrm>
+            <a:off x="10972800" y="292608"/>
+            <a:ext cx="1005840" cy="548640"/>
+          </a:xfrm>
+          <a:prstGeom prst="rect">
+            <a:avLst/>
+          </a:prstGeom>
+          <a:noFill/>
+        </p:spPr>
+        <p:txBody>
+          <a:bodyPr wrap="square">
+            <a:spAutoFit/>
+          </a:bodyPr>
+          <a:lstStyle/>
+          <a:p>
+            <a:pPr algn="r"/>
+            <a:r>
+              <a:rPr sz="2400" b="0" i="0">
+                <a:solidFill>
+                  <a:srgbClr val="1A56AA"/>
+                </a:solidFill>
+              </a:rPr>
+              <a:t>18/19</a:t>
+            </a:r>
+          </a:p>
+        </p:txBody>
+      </p:sp>
+      <p:sp>
+        <p:nvSpPr>
+          <p:cNvPr id="5" name="TextBox 4"/>
+          <p:cNvSpPr txBox="1"/>
+          <p:nvPr/>
+        </p:nvSpPr>
+        <p:spPr>
+          <a:xfrm>
+            <a:off x="731520" y="3931920"/>
+            <a:ext cx="10698480" cy="2560320"/>
+          </a:xfrm>
+          <a:prstGeom prst="rect">
+            <a:avLst/>
+          </a:prstGeom>
+          <a:noFill/>
+        </p:spPr>
+        <p:txBody>
+          <a:bodyPr wrap="square">
+            <a:spAutoFit/>
+          </a:bodyPr>
+          <a:lstStyle/>
+          <a:p>
+            <a:pPr algn="l"/>
+            <a:r>
+              <a:rPr sz="2400" b="0" i="0">
+                <a:solidFill>
+                  <a:srgbClr val="14141E"/>
+                </a:solidFill>
+              </a:rPr>
+              <a:t>Guo et al. (2017) ICML
+Tian et al. (2023) EMNLP
+Xiong et al. (2024) ICLR
+Xue et al. (2025) ACL Findings（MlingConf）
+Xie et al. (2024) arXiv（Black-Box Calibration Survey）
+Murphy (1973) / Bröcker (2009) / Ferro &amp; Fricker (2012)</a:t>
+            </a:r>
+          </a:p>
+        </p:txBody>
+      </p:sp>
+    </p:spTree>
+  </p:cSld>
+  <p:clrMapOvr>
+    <a:masterClrMapping/>
+  </p:clrMapOvr>
+</p:sld>
+</file>
+
+<file path=ppt/slides/slide19.xml><?xml version="1.0" encoding="utf-8"?>
+<p:sld xmlns:a="http://schemas.openxmlformats.org/drawingml/2006/main" xmlns:p="http://schemas.openxmlformats.org/presentationml/2006/main" xmlns:r="http://schemas.openxmlformats.org/officeDocument/2006/relationships">
+  <p:cSld>
+    <p:spTree>
+      <p:nvGrpSpPr>
+        <p:cNvPr id="1" name=""/>
+        <p:cNvGrpSpPr/>
+        <p:nvPr/>
+      </p:nvGrpSpPr>
+      <p:grpSpPr/>
+      <p:sp>
+        <p:nvSpPr>
+          <p:cNvPr id="2" name="Rectangle 1"/>
+          <p:cNvSpPr/>
+          <p:nvPr/>
+        </p:nvSpPr>
+        <p:spPr>
+          <a:xfrm>
+            <a:off x="0" y="0"/>
+            <a:ext cx="12188952" cy="109728"/>
+          </a:xfrm>
+          <a:prstGeom prst="rect">
+            <a:avLst/>
+          </a:prstGeom>
+          <a:solidFill>
+            <a:srgbClr val="1A56AA"/>
+          </a:solidFill>
+          <a:ln>
+            <a:noFill/>
+          </a:ln>
+        </p:spPr>
+        <p:style>
+          <a:lnRef idx="1">
+            <a:schemeClr val="accent1"/>
+          </a:lnRef>
+          <a:fillRef idx="3">
+            <a:schemeClr val="accent1"/>
+          </a:fillRef>
+          <a:effectRef idx="2">
+            <a:schemeClr val="accent1"/>
+          </a:effectRef>
+          <a:fontRef idx="minor">
+            <a:schemeClr val="lt1"/>
+          </a:fontRef>
+        </p:style>
+        <p:txBody>
+          <a:bodyPr rtlCol="0" anchor="ctr"/>
+          <a:lstStyle/>
+          <a:p>
+            <a:pPr algn="ctr"/>
+          </a:p>
+        </p:txBody>
+      </p:sp>
+      <p:sp>
+        <p:nvSpPr>
+          <p:cNvPr id="3" name="TextBox 2"/>
+          <p:cNvSpPr txBox="1"/>
+          <p:nvPr/>
+        </p:nvSpPr>
+        <p:spPr>
+          <a:xfrm>
+            <a:off x="457200" y="292608"/>
+            <a:ext cx="10332720" cy="822960"/>
+          </a:xfrm>
+          <a:prstGeom prst="rect">
+            <a:avLst/>
+          </a:prstGeom>
+          <a:noFill/>
+        </p:spPr>
+        <p:txBody>
+          <a:bodyPr wrap="square">
+            <a:spAutoFit/>
+          </a:bodyPr>
+          <a:lstStyle/>
+          <a:p>
+            <a:pPr algn="l"/>
+            <a:r>
+              <a:rPr sz="3200" b="1" i="0">
+                <a:solidFill>
+                  <a:srgbClr val="14141E"/>
+                </a:solidFill>
+              </a:rPr>
+              <a:t>まとめ</a:t>
+            </a:r>
+          </a:p>
+        </p:txBody>
+      </p:sp>
+      <p:sp>
+        <p:nvSpPr>
+          <p:cNvPr id="4" name="TextBox 3"/>
+          <p:cNvSpPr txBox="1"/>
+          <p:nvPr/>
+        </p:nvSpPr>
+        <p:spPr>
+          <a:xfrm>
+            <a:off x="10972800" y="292608"/>
+            <a:ext cx="1005840" cy="548640"/>
+          </a:xfrm>
+          <a:prstGeom prst="rect">
+            <a:avLst/>
+          </a:prstGeom>
+          <a:noFill/>
+        </p:spPr>
+        <p:txBody>
+          <a:bodyPr wrap="square">
+            <a:spAutoFit/>
+          </a:bodyPr>
+          <a:lstStyle/>
+          <a:p>
+            <a:pPr algn="r"/>
+            <a:r>
+              <a:rPr sz="2400" b="0" i="0">
+                <a:solidFill>
+                  <a:srgbClr val="1A56AA"/>
+                </a:solidFill>
+              </a:rPr>
+              <a:t>19/19</a:t>
             </a:r>
           </a:p>
         </p:txBody>
@@ -5863,7 +6570,7 @@
                   <a:srgbClr val="1A56AA"/>
                 </a:solidFill>
               </a:rPr>
-              <a:t>2/17</a:t>
+              <a:t>2/19</a:t>
             </a:r>
           </a:p>
         </p:txBody>
@@ -6181,7 +6888,7 @@
                   <a:srgbClr val="1A56AA"/>
                 </a:solidFill>
               </a:rPr>
-              <a:t>3/17</a:t>
+              <a:t>3/19</a:t>
             </a:r>
           </a:p>
         </p:txBody>
@@ -6378,7 +7085,7 @@
                   <a:srgbClr val="1A56AA"/>
                 </a:solidFill>
               </a:rPr>
-              <a:t>4/17</a:t>
+              <a:t>4/19</a:t>
             </a:r>
           </a:p>
         </p:txBody>
@@ -6652,7 +7359,7 @@
                   <a:srgbClr val="1A56AA"/>
                 </a:solidFill>
               </a:rPr>
-              <a:t>5/17</a:t>
+              <a:t>5/19</a:t>
             </a:r>
           </a:p>
         </p:txBody>
@@ -6892,7 +7599,7 @@
                   <a:srgbClr val="14141E"/>
                 </a:solidFill>
               </a:rPr>
-              <a:t>背景③：なぜプロンプト設計なのか</a:t>
+              <a:t>背景③：先行研究1 — Tian et al. 2023</a:t>
             </a:r>
           </a:p>
         </p:txBody>
@@ -6926,7 +7633,7 @@
                   <a:srgbClr val="1A56AA"/>
                 </a:solidFill>
               </a:rPr>
-              <a:t>6/17</a:t>
+              <a:t>6/19</a:t>
             </a:r>
           </a:p>
         </p:txBody>
@@ -6939,8 +7646,8 @@
         </p:nvSpPr>
         <p:spPr>
           <a:xfrm>
-            <a:off x="731520" y="1737360"/>
-            <a:ext cx="10698480" cy="3291840"/>
+            <a:off x="731520" y="1600200"/>
+            <a:ext cx="10698480" cy="457200"/>
           </a:xfrm>
           <a:prstGeom prst="rect">
             <a:avLst/>
@@ -6953,55 +7660,219 @@
           </a:bodyPr>
           <a:lstStyle/>
           <a:p>
+            <a:pPr algn="l"/>
+            <a:r>
+              <a:rPr sz="2600" b="1" i="0">
+                <a:solidFill>
+                  <a:srgbClr val="1A56AA"/>
+                </a:solidFill>
+              </a:rPr>
+              <a:t>先行研究の内容</a:t>
+            </a:r>
+          </a:p>
+        </p:txBody>
+      </p:sp>
+      <p:sp>
+        <p:nvSpPr>
+          <p:cNvPr id="6" name="TextBox 5"/>
+          <p:cNvSpPr txBox="1"/>
+          <p:nvPr/>
+        </p:nvSpPr>
+        <p:spPr>
+          <a:xfrm>
+            <a:off x="731520" y="2011680"/>
+            <a:ext cx="10698480" cy="1828800"/>
+          </a:xfrm>
+          <a:prstGeom prst="rect">
+            <a:avLst/>
+          </a:prstGeom>
+          <a:noFill/>
+        </p:spPr>
+        <p:txBody>
+          <a:bodyPr wrap="square">
+            <a:spAutoFit/>
+          </a:bodyPr>
+          <a:lstStyle/>
+          <a:p>
             <a:pPr>
               <a:spcBef>
-                <a:spcPts val="1800"/>
+                <a:spcPts val="1000"/>
               </a:spcBef>
             </a:pPr>
             <a:r>
-              <a:rPr sz="2800">
+              <a:rPr sz="2400">
                 <a:solidFill>
                   <a:srgbClr val="14141E"/>
                 </a:solidFill>
               </a:rPr>
-              <a:t>・改善手法は3系統：Post-hoc補正／ファインチューニング／プロンプト設計</a:t>
+              <a:t>・RLHF済みモデルは内部確率（logprob）に基づく較正が崩壊してしまう</a:t>
             </a:r>
           </a:p>
           <a:p>
             <a:pPr>
               <a:spcBef>
-                <a:spcPts val="1800"/>
+                <a:spcPts val="1000"/>
               </a:spcBef>
             </a:pPr>
             <a:r>
-              <a:rPr sz="2800">
+              <a:rPr sz="2400">
                 <a:solidFill>
                   <a:srgbClr val="14141E"/>
                 </a:solidFill>
               </a:rPr>
-              <a:t>・商用APIはlogitsやパラメータへのアクセスを提供しない</a:t>
+              <a:t>・しかし「確信度をただ聞くだけ」で内部確率より良い較正が得られると発見</a:t>
             </a:r>
           </a:p>
           <a:p>
             <a:pPr>
               <a:spcBef>
-                <a:spcPts val="1800"/>
+                <a:spcPts val="1000"/>
               </a:spcBef>
             </a:pPr>
             <a:r>
-              <a:rPr sz="2800">
+              <a:rPr sz="2400">
                 <a:solidFill>
                   <a:srgbClr val="14141E"/>
                 </a:solidFill>
               </a:rPr>
-              <a:t>・一般利用者が今すぐ使える手段はプロンプト設計のみ（Xie et al. 2024）</a:t>
-            </a:r>
-          </a:p>
-        </p:txBody>
-      </p:sp>
-      <p:sp>
-        <p:nvSpPr>
-          <p:cNvPr id="6" name="Rectangle 5"/>
+              <a:t>・4方式（logprob/言語表現/0-100の数値/複数候補同時提示）を比較し，数値表現が有効</a:t>
+            </a:r>
+          </a:p>
+        </p:txBody>
+      </p:sp>
+      <p:sp>
+        <p:nvSpPr>
+          <p:cNvPr id="7" name="Rectangle 6"/>
+          <p:cNvSpPr/>
+          <p:nvPr/>
+        </p:nvSpPr>
+        <p:spPr>
+          <a:xfrm>
+            <a:off x="548640" y="3977639"/>
+            <a:ext cx="11064240" cy="1417320"/>
+          </a:xfrm>
+          <a:prstGeom prst="rect">
+            <a:avLst/>
+          </a:prstGeom>
+          <a:solidFill>
+            <a:srgbClr val="FBECEA"/>
+          </a:solidFill>
+          <a:ln>
+            <a:noFill/>
+          </a:ln>
+        </p:spPr>
+        <p:style>
+          <a:lnRef idx="1">
+            <a:schemeClr val="accent1"/>
+          </a:lnRef>
+          <a:fillRef idx="3">
+            <a:schemeClr val="accent1"/>
+          </a:fillRef>
+          <a:effectRef idx="2">
+            <a:schemeClr val="accent1"/>
+          </a:effectRef>
+          <a:fontRef idx="minor">
+            <a:schemeClr val="lt1"/>
+          </a:fontRef>
+        </p:style>
+        <p:txBody>
+          <a:bodyPr rtlCol="0" anchor="ctr"/>
+          <a:lstStyle/>
+          <a:p>
+            <a:pPr algn="ctr"/>
+          </a:p>
+        </p:txBody>
+      </p:sp>
+      <p:sp>
+        <p:nvSpPr>
+          <p:cNvPr id="8" name="TextBox 7"/>
+          <p:cNvSpPr txBox="1"/>
+          <p:nvPr/>
+        </p:nvSpPr>
+        <p:spPr>
+          <a:xfrm>
+            <a:off x="731520" y="4069080"/>
+            <a:ext cx="10698480" cy="457200"/>
+          </a:xfrm>
+          <a:prstGeom prst="rect">
+            <a:avLst/>
+          </a:prstGeom>
+          <a:noFill/>
+        </p:spPr>
+        <p:txBody>
+          <a:bodyPr wrap="square">
+            <a:spAutoFit/>
+          </a:bodyPr>
+          <a:lstStyle/>
+          <a:p>
+            <a:pPr algn="l"/>
+            <a:r>
+              <a:rPr sz="2600" b="1" i="0">
+                <a:solidFill>
+                  <a:srgbClr val="B02A1E"/>
+                </a:solidFill>
+              </a:rPr>
+              <a:t>残された研究の余地</a:t>
+            </a:r>
+          </a:p>
+        </p:txBody>
+      </p:sp>
+      <p:sp>
+        <p:nvSpPr>
+          <p:cNvPr id="9" name="TextBox 8"/>
+          <p:cNvSpPr txBox="1"/>
+          <p:nvPr/>
+        </p:nvSpPr>
+        <p:spPr>
+          <a:xfrm>
+            <a:off x="731520" y="4480559"/>
+            <a:ext cx="10698480" cy="1188720"/>
+          </a:xfrm>
+          <a:prstGeom prst="rect">
+            <a:avLst/>
+          </a:prstGeom>
+          <a:noFill/>
+        </p:spPr>
+        <p:txBody>
+          <a:bodyPr wrap="square">
+            <a:spAutoFit/>
+          </a:bodyPr>
+          <a:lstStyle/>
+          <a:p>
+            <a:pPr>
+              <a:spcBef>
+                <a:spcPts val="800"/>
+              </a:spcBef>
+            </a:pPr>
+            <a:r>
+              <a:rPr sz="2400">
+                <a:solidFill>
+                  <a:srgbClr val="14141E"/>
+                </a:solidFill>
+              </a:rPr>
+              <a:t>・検証は英語のQAタスク（TriviaQA・SciQ等）のみ</a:t>
+            </a:r>
+          </a:p>
+          <a:p>
+            <a:pPr>
+              <a:spcBef>
+                <a:spcPts val="800"/>
+              </a:spcBef>
+            </a:pPr>
+            <a:r>
+              <a:rPr sz="2400">
+                <a:solidFill>
+                  <a:srgbClr val="14141E"/>
+                </a:solidFill>
+              </a:rPr>
+              <a:t>・日本語モデル・日本語タスクで同じ傾向が出るかは未検証</a:t>
+            </a:r>
+          </a:p>
+        </p:txBody>
+      </p:sp>
+      <p:sp>
+        <p:nvSpPr>
+          <p:cNvPr id="10" name="Rectangle 9"/>
           <p:cNvSpPr/>
           <p:nvPr/>
         </p:nvSpPr>
@@ -7044,7 +7915,7 @@
       </p:sp>
       <p:sp>
         <p:nvSpPr>
-          <p:cNvPr id="7" name="TextBox 6"/>
+          <p:cNvPr id="11" name="TextBox 10"/>
           <p:cNvSpPr txBox="1"/>
           <p:nvPr/>
         </p:nvSpPr>
@@ -7071,7 +7942,7 @@
                   <a:srgbClr val="1A56AA"/>
                 </a:solidFill>
               </a:rPr>
-              <a:t>1メッセージ：数ある改善手法の中でプロンプト設計を選ぶ理由</a:t>
+              <a:t>1メッセージ：「ただ聞くだけで較正が改善する」という本研究の土台と，その限界</a:t>
             </a:r>
           </a:p>
         </p:txBody>
@@ -7166,7 +8037,7 @@
                   <a:srgbClr val="14141E"/>
                 </a:solidFill>
               </a:rPr>
-              <a:t>背景④：先行研究との違い</a:t>
+              <a:t>背景④：先行研究2 — Xiong et al. 2024</a:t>
             </a:r>
           </a:p>
         </p:txBody>
@@ -7200,22 +8071,768 @@
                   <a:srgbClr val="1A56AA"/>
                 </a:solidFill>
               </a:rPr>
-              <a:t>7/17</a:t>
+              <a:t>7/19</a:t>
+            </a:r>
+          </a:p>
+        </p:txBody>
+      </p:sp>
+      <p:sp>
+        <p:nvSpPr>
+          <p:cNvPr id="5" name="TextBox 4"/>
+          <p:cNvSpPr txBox="1"/>
+          <p:nvPr/>
+        </p:nvSpPr>
+        <p:spPr>
+          <a:xfrm>
+            <a:off x="731520" y="1600200"/>
+            <a:ext cx="10698480" cy="457200"/>
+          </a:xfrm>
+          <a:prstGeom prst="rect">
+            <a:avLst/>
+          </a:prstGeom>
+          <a:noFill/>
+        </p:spPr>
+        <p:txBody>
+          <a:bodyPr wrap="square">
+            <a:spAutoFit/>
+          </a:bodyPr>
+          <a:lstStyle/>
+          <a:p>
+            <a:pPr algn="l"/>
+            <a:r>
+              <a:rPr sz="2600" b="1" i="0">
+                <a:solidFill>
+                  <a:srgbClr val="1A56AA"/>
+                </a:solidFill>
+              </a:rPr>
+              <a:t>先行研究の内容</a:t>
+            </a:r>
+          </a:p>
+        </p:txBody>
+      </p:sp>
+      <p:sp>
+        <p:nvSpPr>
+          <p:cNvPr id="6" name="TextBox 5"/>
+          <p:cNvSpPr txBox="1"/>
+          <p:nvPr/>
+        </p:nvSpPr>
+        <p:spPr>
+          <a:xfrm>
+            <a:off x="731520" y="2011680"/>
+            <a:ext cx="10698480" cy="1828800"/>
+          </a:xfrm>
+          <a:prstGeom prst="rect">
+            <a:avLst/>
+          </a:prstGeom>
+          <a:noFill/>
+        </p:spPr>
+        <p:txBody>
+          <a:bodyPr wrap="square">
+            <a:spAutoFit/>
+          </a:bodyPr>
+          <a:lstStyle/>
+          <a:p>
+            <a:pPr>
+              <a:spcBef>
+                <a:spcPts val="1000"/>
+              </a:spcBef>
+            </a:pPr>
+            <a:r>
+              <a:rPr sz="2400">
+                <a:solidFill>
+                  <a:srgbClr val="14141E"/>
+                </a:solidFill>
+              </a:rPr>
+              <a:t>・Black-box確信度推定の体系的フレームワークを提案（プロンプト戦略/サンプリング/集約）</a:t>
+            </a:r>
+          </a:p>
+          <a:p>
+            <a:pPr>
+              <a:spcBef>
+                <a:spcPts val="1000"/>
+              </a:spcBef>
+            </a:pPr>
+            <a:r>
+              <a:rPr sz="2400">
+                <a:solidFill>
+                  <a:srgbClr val="14141E"/>
+                </a:solidFill>
+              </a:rPr>
+              <a:t>・5種類のデータセット×5モデルで較正精度と失敗予測を評価</a:t>
+            </a:r>
+          </a:p>
+          <a:p>
+            <a:pPr>
+              <a:spcBef>
+                <a:spcPts val="1000"/>
+              </a:spcBef>
+            </a:pPr>
+            <a:r>
+              <a:rPr sz="2400">
+                <a:solidFill>
+                  <a:srgbClr val="14141E"/>
+                </a:solidFill>
+              </a:rPr>
+              <a:t>・LLMは総じて過信しがちで，どの方式も一貫して他を上回るわけではないと報告</a:t>
+            </a:r>
+          </a:p>
+        </p:txBody>
+      </p:sp>
+      <p:sp>
+        <p:nvSpPr>
+          <p:cNvPr id="7" name="Rectangle 6"/>
+          <p:cNvSpPr/>
+          <p:nvPr/>
+        </p:nvSpPr>
+        <p:spPr>
+          <a:xfrm>
+            <a:off x="548640" y="3977639"/>
+            <a:ext cx="11064240" cy="1417320"/>
+          </a:xfrm>
+          <a:prstGeom prst="rect">
+            <a:avLst/>
+          </a:prstGeom>
+          <a:solidFill>
+            <a:srgbClr val="FBECEA"/>
+          </a:solidFill>
+          <a:ln>
+            <a:noFill/>
+          </a:ln>
+        </p:spPr>
+        <p:style>
+          <a:lnRef idx="1">
+            <a:schemeClr val="accent1"/>
+          </a:lnRef>
+          <a:fillRef idx="3">
+            <a:schemeClr val="accent1"/>
+          </a:fillRef>
+          <a:effectRef idx="2">
+            <a:schemeClr val="accent1"/>
+          </a:effectRef>
+          <a:fontRef idx="minor">
+            <a:schemeClr val="lt1"/>
+          </a:fontRef>
+        </p:style>
+        <p:txBody>
+          <a:bodyPr rtlCol="0" anchor="ctr"/>
+          <a:lstStyle/>
+          <a:p>
+            <a:pPr algn="ctr"/>
+          </a:p>
+        </p:txBody>
+      </p:sp>
+      <p:sp>
+        <p:nvSpPr>
+          <p:cNvPr id="8" name="TextBox 7"/>
+          <p:cNvSpPr txBox="1"/>
+          <p:nvPr/>
+        </p:nvSpPr>
+        <p:spPr>
+          <a:xfrm>
+            <a:off x="731520" y="4069080"/>
+            <a:ext cx="10698480" cy="457200"/>
+          </a:xfrm>
+          <a:prstGeom prst="rect">
+            <a:avLst/>
+          </a:prstGeom>
+          <a:noFill/>
+        </p:spPr>
+        <p:txBody>
+          <a:bodyPr wrap="square">
+            <a:spAutoFit/>
+          </a:bodyPr>
+          <a:lstStyle/>
+          <a:p>
+            <a:pPr algn="l"/>
+            <a:r>
+              <a:rPr sz="2600" b="1" i="0">
+                <a:solidFill>
+                  <a:srgbClr val="B02A1E"/>
+                </a:solidFill>
+              </a:rPr>
+              <a:t>残された研究の余地</a:t>
+            </a:r>
+          </a:p>
+        </p:txBody>
+      </p:sp>
+      <p:sp>
+        <p:nvSpPr>
+          <p:cNvPr id="9" name="TextBox 8"/>
+          <p:cNvSpPr txBox="1"/>
+          <p:nvPr/>
+        </p:nvSpPr>
+        <p:spPr>
+          <a:xfrm>
+            <a:off x="731520" y="4480559"/>
+            <a:ext cx="10698480" cy="1188720"/>
+          </a:xfrm>
+          <a:prstGeom prst="rect">
+            <a:avLst/>
+          </a:prstGeom>
+          <a:noFill/>
+        </p:spPr>
+        <p:txBody>
+          <a:bodyPr wrap="square">
+            <a:spAutoFit/>
+          </a:bodyPr>
+          <a:lstStyle/>
+          <a:p>
+            <a:pPr>
+              <a:spcBef>
+                <a:spcPts val="800"/>
+              </a:spcBef>
+            </a:pPr>
+            <a:r>
+              <a:rPr sz="2400">
+                <a:solidFill>
+                  <a:srgbClr val="14141E"/>
+                </a:solidFill>
+              </a:rPr>
+              <a:t>・専門知識を要するタスクでは全手法が苦戦しており，改善の余地が大きいと自ら報告</a:t>
+            </a:r>
+          </a:p>
+          <a:p>
+            <a:pPr>
+              <a:spcBef>
+                <a:spcPts val="800"/>
+              </a:spcBef>
+            </a:pPr>
+            <a:r>
+              <a:rPr sz="2400">
+                <a:solidFill>
+                  <a:srgbClr val="14141E"/>
+                </a:solidFill>
+              </a:rPr>
+              <a:t>・検証は英語タスクが中心で，日本語での体系的な方式間比較は行っていない</a:t>
+            </a:r>
+          </a:p>
+        </p:txBody>
+      </p:sp>
+      <p:sp>
+        <p:nvSpPr>
+          <p:cNvPr id="10" name="Rectangle 9"/>
+          <p:cNvSpPr/>
+          <p:nvPr/>
+        </p:nvSpPr>
+        <p:spPr>
+          <a:xfrm>
+            <a:off x="0" y="6263640"/>
+            <a:ext cx="12188952" cy="594360"/>
+          </a:xfrm>
+          <a:prstGeom prst="rect">
+            <a:avLst/>
+          </a:prstGeom>
+          <a:solidFill>
+            <a:srgbClr val="ECF1F9"/>
+          </a:solidFill>
+          <a:ln>
+            <a:noFill/>
+          </a:ln>
+        </p:spPr>
+        <p:style>
+          <a:lnRef idx="1">
+            <a:schemeClr val="accent1"/>
+          </a:lnRef>
+          <a:fillRef idx="3">
+            <a:schemeClr val="accent1"/>
+          </a:fillRef>
+          <a:effectRef idx="2">
+            <a:schemeClr val="accent1"/>
+          </a:effectRef>
+          <a:fontRef idx="minor">
+            <a:schemeClr val="lt1"/>
+          </a:fontRef>
+        </p:style>
+        <p:txBody>
+          <a:bodyPr rtlCol="0" anchor="ctr"/>
+          <a:lstStyle/>
+          <a:p>
+            <a:pPr algn="ctr"/>
+          </a:p>
+        </p:txBody>
+      </p:sp>
+      <p:sp>
+        <p:nvSpPr>
+          <p:cNvPr id="11" name="TextBox 10"/>
+          <p:cNvSpPr txBox="1"/>
+          <p:nvPr/>
+        </p:nvSpPr>
+        <p:spPr>
+          <a:xfrm>
+            <a:off x="457200" y="6309360"/>
+            <a:ext cx="11247120" cy="502920"/>
+          </a:xfrm>
+          <a:prstGeom prst="rect">
+            <a:avLst/>
+          </a:prstGeom>
+          <a:noFill/>
+        </p:spPr>
+        <p:txBody>
+          <a:bodyPr wrap="square">
+            <a:spAutoFit/>
+          </a:bodyPr>
+          <a:lstStyle/>
+          <a:p>
+            <a:pPr algn="l"/>
+            <a:r>
+              <a:rPr sz="2400" b="0" i="1">
+                <a:solidFill>
+                  <a:srgbClr val="1A56AA"/>
+                </a:solidFill>
+              </a:rPr>
+              <a:t>1メッセージ：確信度手法比較の先駆けだが，方式間の優劣にはまだ決着がついていない</a:t>
+            </a:r>
+          </a:p>
+        </p:txBody>
+      </p:sp>
+    </p:spTree>
+  </p:cSld>
+  <p:clrMapOvr>
+    <a:masterClrMapping/>
+  </p:clrMapOvr>
+</p:sld>
+</file>
+
+<file path=ppt/slides/slide8.xml><?xml version="1.0" encoding="utf-8"?>
+<p:sld xmlns:a="http://schemas.openxmlformats.org/drawingml/2006/main" xmlns:p="http://schemas.openxmlformats.org/presentationml/2006/main" xmlns:r="http://schemas.openxmlformats.org/officeDocument/2006/relationships">
+  <p:cSld>
+    <p:spTree>
+      <p:nvGrpSpPr>
+        <p:cNvPr id="1" name=""/>
+        <p:cNvGrpSpPr/>
+        <p:nvPr/>
+      </p:nvGrpSpPr>
+      <p:grpSpPr/>
+      <p:sp>
+        <p:nvSpPr>
+          <p:cNvPr id="2" name="Rectangle 1"/>
+          <p:cNvSpPr/>
+          <p:nvPr/>
+        </p:nvSpPr>
+        <p:spPr>
+          <a:xfrm>
+            <a:off x="0" y="0"/>
+            <a:ext cx="12188952" cy="109728"/>
+          </a:xfrm>
+          <a:prstGeom prst="rect">
+            <a:avLst/>
+          </a:prstGeom>
+          <a:solidFill>
+            <a:srgbClr val="1A56AA"/>
+          </a:solidFill>
+          <a:ln>
+            <a:noFill/>
+          </a:ln>
+        </p:spPr>
+        <p:style>
+          <a:lnRef idx="1">
+            <a:schemeClr val="accent1"/>
+          </a:lnRef>
+          <a:fillRef idx="3">
+            <a:schemeClr val="accent1"/>
+          </a:fillRef>
+          <a:effectRef idx="2">
+            <a:schemeClr val="accent1"/>
+          </a:effectRef>
+          <a:fontRef idx="minor">
+            <a:schemeClr val="lt1"/>
+          </a:fontRef>
+        </p:style>
+        <p:txBody>
+          <a:bodyPr rtlCol="0" anchor="ctr"/>
+          <a:lstStyle/>
+          <a:p>
+            <a:pPr algn="ctr"/>
+          </a:p>
+        </p:txBody>
+      </p:sp>
+      <p:sp>
+        <p:nvSpPr>
+          <p:cNvPr id="3" name="TextBox 2"/>
+          <p:cNvSpPr txBox="1"/>
+          <p:nvPr/>
+        </p:nvSpPr>
+        <p:spPr>
+          <a:xfrm>
+            <a:off x="457200" y="292608"/>
+            <a:ext cx="10332720" cy="822960"/>
+          </a:xfrm>
+          <a:prstGeom prst="rect">
+            <a:avLst/>
+          </a:prstGeom>
+          <a:noFill/>
+        </p:spPr>
+        <p:txBody>
+          <a:bodyPr wrap="square">
+            <a:spAutoFit/>
+          </a:bodyPr>
+          <a:lstStyle/>
+          <a:p>
+            <a:pPr algn="l"/>
+            <a:r>
+              <a:rPr sz="3200" b="1" i="0">
+                <a:solidFill>
+                  <a:srgbClr val="14141E"/>
+                </a:solidFill>
+              </a:rPr>
+              <a:t>背景⑤：なぜプロンプト設計なのか</a:t>
+            </a:r>
+          </a:p>
+        </p:txBody>
+      </p:sp>
+      <p:sp>
+        <p:nvSpPr>
+          <p:cNvPr id="4" name="TextBox 3"/>
+          <p:cNvSpPr txBox="1"/>
+          <p:nvPr/>
+        </p:nvSpPr>
+        <p:spPr>
+          <a:xfrm>
+            <a:off x="10972800" y="292608"/>
+            <a:ext cx="1005840" cy="548640"/>
+          </a:xfrm>
+          <a:prstGeom prst="rect">
+            <a:avLst/>
+          </a:prstGeom>
+          <a:noFill/>
+        </p:spPr>
+        <p:txBody>
+          <a:bodyPr wrap="square">
+            <a:spAutoFit/>
+          </a:bodyPr>
+          <a:lstStyle/>
+          <a:p>
+            <a:pPr algn="r"/>
+            <a:r>
+              <a:rPr sz="2400" b="0" i="0">
+                <a:solidFill>
+                  <a:srgbClr val="1A56AA"/>
+                </a:solidFill>
+              </a:rPr>
+              <a:t>8/19</a:t>
+            </a:r>
+          </a:p>
+        </p:txBody>
+      </p:sp>
+      <p:sp>
+        <p:nvSpPr>
+          <p:cNvPr id="5" name="TextBox 4"/>
+          <p:cNvSpPr txBox="1"/>
+          <p:nvPr/>
+        </p:nvSpPr>
+        <p:spPr>
+          <a:xfrm>
+            <a:off x="731520" y="1737360"/>
+            <a:ext cx="10698480" cy="3291840"/>
+          </a:xfrm>
+          <a:prstGeom prst="rect">
+            <a:avLst/>
+          </a:prstGeom>
+          <a:noFill/>
+        </p:spPr>
+        <p:txBody>
+          <a:bodyPr wrap="square">
+            <a:spAutoFit/>
+          </a:bodyPr>
+          <a:lstStyle/>
+          <a:p>
+            <a:pPr>
+              <a:spcBef>
+                <a:spcPts val="1800"/>
+              </a:spcBef>
+            </a:pPr>
+            <a:r>
+              <a:rPr sz="2800">
+                <a:solidFill>
+                  <a:srgbClr val="14141E"/>
+                </a:solidFill>
+              </a:rPr>
+              <a:t>・改善手法は3系統：Post-hoc補正／ファインチューニング／プロンプト設計</a:t>
+            </a:r>
+          </a:p>
+          <a:p>
+            <a:pPr>
+              <a:spcBef>
+                <a:spcPts val="1800"/>
+              </a:spcBef>
+            </a:pPr>
+            <a:r>
+              <a:rPr sz="2800">
+                <a:solidFill>
+                  <a:srgbClr val="14141E"/>
+                </a:solidFill>
+              </a:rPr>
+              <a:t>・商用APIはlogitsやパラメータへのアクセスを提供しない</a:t>
+            </a:r>
+          </a:p>
+          <a:p>
+            <a:pPr>
+              <a:spcBef>
+                <a:spcPts val="1800"/>
+              </a:spcBef>
+            </a:pPr>
+            <a:r>
+              <a:rPr sz="2800">
+                <a:solidFill>
+                  <a:srgbClr val="14141E"/>
+                </a:solidFill>
+              </a:rPr>
+              <a:t>・一般利用者が今すぐ使える手段はプロンプト設計のみ（Xie et al. 2024）</a:t>
+            </a:r>
+          </a:p>
+        </p:txBody>
+      </p:sp>
+      <p:sp>
+        <p:nvSpPr>
+          <p:cNvPr id="6" name="Rectangle 5"/>
+          <p:cNvSpPr/>
+          <p:nvPr/>
+        </p:nvSpPr>
+        <p:spPr>
+          <a:xfrm>
+            <a:off x="0" y="6263640"/>
+            <a:ext cx="12188952" cy="594360"/>
+          </a:xfrm>
+          <a:prstGeom prst="rect">
+            <a:avLst/>
+          </a:prstGeom>
+          <a:solidFill>
+            <a:srgbClr val="ECF1F9"/>
+          </a:solidFill>
+          <a:ln>
+            <a:noFill/>
+          </a:ln>
+        </p:spPr>
+        <p:style>
+          <a:lnRef idx="1">
+            <a:schemeClr val="accent1"/>
+          </a:lnRef>
+          <a:fillRef idx="3">
+            <a:schemeClr val="accent1"/>
+          </a:fillRef>
+          <a:effectRef idx="2">
+            <a:schemeClr val="accent1"/>
+          </a:effectRef>
+          <a:fontRef idx="minor">
+            <a:schemeClr val="lt1"/>
+          </a:fontRef>
+        </p:style>
+        <p:txBody>
+          <a:bodyPr rtlCol="0" anchor="ctr"/>
+          <a:lstStyle/>
+          <a:p>
+            <a:pPr algn="ctr"/>
+          </a:p>
+        </p:txBody>
+      </p:sp>
+      <p:sp>
+        <p:nvSpPr>
+          <p:cNvPr id="7" name="TextBox 6"/>
+          <p:cNvSpPr txBox="1"/>
+          <p:nvPr/>
+        </p:nvSpPr>
+        <p:spPr>
+          <a:xfrm>
+            <a:off x="457200" y="6309360"/>
+            <a:ext cx="11247120" cy="502920"/>
+          </a:xfrm>
+          <a:prstGeom prst="rect">
+            <a:avLst/>
+          </a:prstGeom>
+          <a:noFill/>
+        </p:spPr>
+        <p:txBody>
+          <a:bodyPr wrap="square">
+            <a:spAutoFit/>
+          </a:bodyPr>
+          <a:lstStyle/>
+          <a:p>
+            <a:pPr algn="l"/>
+            <a:r>
+              <a:rPr sz="2400" b="0" i="1">
+                <a:solidFill>
+                  <a:srgbClr val="1A56AA"/>
+                </a:solidFill>
+              </a:rPr>
+              <a:t>1メッセージ：数ある改善手法の中でプロンプト設計を選ぶ理由</a:t>
+            </a:r>
+          </a:p>
+        </p:txBody>
+      </p:sp>
+    </p:spTree>
+  </p:cSld>
+  <p:clrMapOvr>
+    <a:masterClrMapping/>
+  </p:clrMapOvr>
+</p:sld>
+</file>
+
+<file path=ppt/slides/slide9.xml><?xml version="1.0" encoding="utf-8"?>
+<p:sld xmlns:a="http://schemas.openxmlformats.org/drawingml/2006/main" xmlns:p="http://schemas.openxmlformats.org/presentationml/2006/main" xmlns:r="http://schemas.openxmlformats.org/officeDocument/2006/relationships">
+  <p:cSld>
+    <p:spTree>
+      <p:nvGrpSpPr>
+        <p:cNvPr id="1" name=""/>
+        <p:cNvGrpSpPr/>
+        <p:nvPr/>
+      </p:nvGrpSpPr>
+      <p:grpSpPr/>
+      <p:sp>
+        <p:nvSpPr>
+          <p:cNvPr id="2" name="Rectangle 1"/>
+          <p:cNvSpPr/>
+          <p:nvPr/>
+        </p:nvSpPr>
+        <p:spPr>
+          <a:xfrm>
+            <a:off x="0" y="0"/>
+            <a:ext cx="12188952" cy="109728"/>
+          </a:xfrm>
+          <a:prstGeom prst="rect">
+            <a:avLst/>
+          </a:prstGeom>
+          <a:solidFill>
+            <a:srgbClr val="1A56AA"/>
+          </a:solidFill>
+          <a:ln>
+            <a:noFill/>
+          </a:ln>
+        </p:spPr>
+        <p:style>
+          <a:lnRef idx="1">
+            <a:schemeClr val="accent1"/>
+          </a:lnRef>
+          <a:fillRef idx="3">
+            <a:schemeClr val="accent1"/>
+          </a:fillRef>
+          <a:effectRef idx="2">
+            <a:schemeClr val="accent1"/>
+          </a:effectRef>
+          <a:fontRef idx="minor">
+            <a:schemeClr val="lt1"/>
+          </a:fontRef>
+        </p:style>
+        <p:txBody>
+          <a:bodyPr rtlCol="0" anchor="ctr"/>
+          <a:lstStyle/>
+          <a:p>
+            <a:pPr algn="ctr"/>
+          </a:p>
+        </p:txBody>
+      </p:sp>
+      <p:sp>
+        <p:nvSpPr>
+          <p:cNvPr id="3" name="TextBox 2"/>
+          <p:cNvSpPr txBox="1"/>
+          <p:nvPr/>
+        </p:nvSpPr>
+        <p:spPr>
+          <a:xfrm>
+            <a:off x="457200" y="292608"/>
+            <a:ext cx="10332720" cy="822960"/>
+          </a:xfrm>
+          <a:prstGeom prst="rect">
+            <a:avLst/>
+          </a:prstGeom>
+          <a:noFill/>
+        </p:spPr>
+        <p:txBody>
+          <a:bodyPr wrap="square">
+            <a:spAutoFit/>
+          </a:bodyPr>
+          <a:lstStyle/>
+          <a:p>
+            <a:pPr algn="l"/>
+            <a:r>
+              <a:rPr sz="3200" b="1" i="0">
+                <a:solidFill>
+                  <a:srgbClr val="14141E"/>
+                </a:solidFill>
+              </a:rPr>
+              <a:t>背景⑥：先行研究3 — MlingConfとの比較</a:t>
+            </a:r>
+          </a:p>
+        </p:txBody>
+      </p:sp>
+      <p:sp>
+        <p:nvSpPr>
+          <p:cNvPr id="4" name="TextBox 3"/>
+          <p:cNvSpPr txBox="1"/>
+          <p:nvPr/>
+        </p:nvSpPr>
+        <p:spPr>
+          <a:xfrm>
+            <a:off x="10972800" y="292608"/>
+            <a:ext cx="1005840" cy="548640"/>
+          </a:xfrm>
+          <a:prstGeom prst="rect">
+            <a:avLst/>
+          </a:prstGeom>
+          <a:noFill/>
+        </p:spPr>
+        <p:txBody>
+          <a:bodyPr wrap="square">
+            <a:spAutoFit/>
+          </a:bodyPr>
+          <a:lstStyle/>
+          <a:p>
+            <a:pPr algn="r"/>
+            <a:r>
+              <a:rPr sz="2400" b="0" i="0">
+                <a:solidFill>
+                  <a:srgbClr val="1A56AA"/>
+                </a:solidFill>
+              </a:rPr>
+              <a:t>9/19</a:t>
+            </a:r>
+          </a:p>
+        </p:txBody>
+      </p:sp>
+      <p:sp>
+        <p:nvSpPr>
+          <p:cNvPr id="5" name="TextBox 4"/>
+          <p:cNvSpPr txBox="1"/>
+          <p:nvPr/>
+        </p:nvSpPr>
+        <p:spPr>
+          <a:xfrm>
+            <a:off x="731520" y="1508760"/>
+            <a:ext cx="10698480" cy="548640"/>
+          </a:xfrm>
+          <a:prstGeom prst="rect">
+            <a:avLst/>
+          </a:prstGeom>
+          <a:noFill/>
+        </p:spPr>
+        <p:txBody>
+          <a:bodyPr wrap="square">
+            <a:spAutoFit/>
+          </a:bodyPr>
+          <a:lstStyle/>
+          <a:p>
+            <a:pPr algn="l"/>
+            <a:r>
+              <a:rPr sz="2400" b="0" i="0">
+                <a:solidFill>
+                  <a:srgbClr val="14141E"/>
+                </a:solidFill>
+              </a:rPr>
+              <a:t>MlingConf(Xue et al. 2025)は日本語含む5言語で確信度手法（単一方式）を検証済み</a:t>
             </a:r>
           </a:p>
         </p:txBody>
       </p:sp>
       <p:graphicFrame>
         <p:nvGraphicFramePr>
-          <p:cNvPr id="5" name="Table 4"/>
+          <p:cNvPr id="6" name="Table 5"/>
           <p:cNvGraphicFramePr>
             <a:graphicFrameLocks noGrp="1"/>
           </p:cNvGraphicFramePr>
           <p:nvPr/>
         </p:nvGraphicFramePr>
         <p:xfrm>
-          <a:off x="548640" y="1737360"/>
-          <a:ext cx="11064240" cy="3291840"/>
+          <a:off x="548640" y="2148840"/>
+          <a:ext cx="11064240" cy="2926080"/>
         </p:xfrm>
         <a:graphic>
           <a:graphicData uri="http://schemas.openxmlformats.org/drawingml/2006/table">
@@ -7229,7 +8846,7 @@
                 <a:gridCol w="2766060"/>
                 <a:gridCol w="2766060"/>
               </a:tblGrid>
-              <a:tr h="658368">
+              <a:tr h="585216">
                 <a:tc>
                   <a:txBody>
                     <a:bodyPr/>
@@ -7251,7 +8868,7 @@
                     <a:p>
                       <a:pPr algn="ctr"/>
                       <a:r>
-                        <a:rPr sz="2400" b="1">
+                        <a:rPr sz="2200" b="1">
                           <a:solidFill>
                             <a:srgbClr val="FFFFFF"/>
                           </a:solidFill>
@@ -7273,7 +8890,7 @@
                     <a:p>
                       <a:pPr algn="ctr"/>
                       <a:r>
-                        <a:rPr sz="2400" b="1">
+                        <a:rPr sz="2200" b="1">
                           <a:solidFill>
                             <a:srgbClr val="FFFFFF"/>
                           </a:solidFill>
@@ -7295,7 +8912,7 @@
                     <a:p>
                       <a:pPr algn="ctr"/>
                       <a:r>
-                        <a:rPr sz="2400" b="1">
+                        <a:rPr sz="2200" b="1">
                           <a:solidFill>
                             <a:srgbClr val="FFFFFF"/>
                           </a:solidFill>
@@ -7311,14 +8928,14 @@
                   </a:tcPr>
                 </a:tc>
               </a:tr>
-              <a:tr h="658368">
+              <a:tr h="585216">
                 <a:tc>
                   <a:txBody>
                     <a:bodyPr/>
                     <a:lstStyle/>
                     <a:p>
                       <a:r>
-                        <a:rPr sz="2400">
+                        <a:rPr sz="2200">
                           <a:solidFill>
                             <a:srgbClr val="14141E"/>
                           </a:solidFill>
@@ -7339,7 +8956,7 @@
                     <a:lstStyle/>
                     <a:p>
                       <a:r>
-                        <a:rPr sz="2400">
+                        <a:rPr sz="2200">
                           <a:solidFill>
                             <a:srgbClr val="14141E"/>
                           </a:solidFill>
@@ -7360,7 +8977,7 @@
                     <a:lstStyle/>
                     <a:p>
                       <a:r>
-                        <a:rPr sz="2400">
+                        <a:rPr sz="2200">
                           <a:solidFill>
                             <a:srgbClr val="14141E"/>
                           </a:solidFill>
@@ -7381,7 +8998,7 @@
                     <a:lstStyle/>
                     <a:p>
                       <a:r>
-                        <a:rPr sz="2400">
+                        <a:rPr sz="2200">
                           <a:solidFill>
                             <a:srgbClr val="14141E"/>
                           </a:solidFill>
@@ -7397,14 +9014,14 @@
                   </a:tcPr>
                 </a:tc>
               </a:tr>
-              <a:tr h="658368">
+              <a:tr h="585216">
                 <a:tc>
                   <a:txBody>
                     <a:bodyPr/>
                     <a:lstStyle/>
                     <a:p>
                       <a:r>
-                        <a:rPr sz="2400">
+                        <a:rPr sz="2200">
                           <a:solidFill>
                             <a:srgbClr val="14141E"/>
                           </a:solidFill>
@@ -7425,7 +9042,7 @@
                     <a:lstStyle/>
                     <a:p>
                       <a:r>
-                        <a:rPr sz="2400">
+                        <a:rPr sz="2200">
                           <a:solidFill>
                             <a:srgbClr val="14141E"/>
                           </a:solidFill>
@@ -7446,7 +9063,7 @@
                     <a:lstStyle/>
                     <a:p>
                       <a:r>
-                        <a:rPr sz="2400">
+                        <a:rPr sz="2200">
                           <a:solidFill>
                             <a:srgbClr val="14141E"/>
                           </a:solidFill>
@@ -7467,7 +9084,7 @@
                     <a:lstStyle/>
                     <a:p>
                       <a:r>
-                        <a:rPr sz="2400">
+                        <a:rPr sz="2200">
                           <a:solidFill>
                             <a:srgbClr val="14141E"/>
                           </a:solidFill>
@@ -7483,14 +9100,14 @@
                   </a:tcPr>
                 </a:tc>
               </a:tr>
-              <a:tr h="658368">
+              <a:tr h="585216">
                 <a:tc>
                   <a:txBody>
                     <a:bodyPr/>
                     <a:lstStyle/>
                     <a:p>
                       <a:r>
-                        <a:rPr sz="2400">
+                        <a:rPr sz="2200">
                           <a:solidFill>
                             <a:srgbClr val="14141E"/>
                           </a:solidFill>
@@ -7511,7 +9128,7 @@
                     <a:lstStyle/>
                     <a:p>
                       <a:r>
-                        <a:rPr sz="2400">
+                        <a:rPr sz="2200">
                           <a:solidFill>
                             <a:srgbClr val="14141E"/>
                           </a:solidFill>
@@ -7532,7 +9149,7 @@
                     <a:lstStyle/>
                     <a:p>
                       <a:r>
-                        <a:rPr sz="2400">
+                        <a:rPr sz="2200">
                           <a:solidFill>
                             <a:srgbClr val="14141E"/>
                           </a:solidFill>
@@ -7553,7 +9170,7 @@
                     <a:lstStyle/>
                     <a:p>
                       <a:r>
-                        <a:rPr sz="2400">
+                        <a:rPr sz="2200">
                           <a:solidFill>
                             <a:srgbClr val="14141E"/>
                           </a:solidFill>
@@ -7569,14 +9186,14 @@
                   </a:tcPr>
                 </a:tc>
               </a:tr>
-              <a:tr h="658368">
+              <a:tr h="585216">
                 <a:tc>
                   <a:txBody>
                     <a:bodyPr/>
                     <a:lstStyle/>
                     <a:p>
                       <a:r>
-                        <a:rPr sz="2400">
+                        <a:rPr sz="2200">
                           <a:solidFill>
                             <a:srgbClr val="14141E"/>
                           </a:solidFill>
@@ -7597,7 +9214,7 @@
                     <a:lstStyle/>
                     <a:p>
                       <a:r>
-                        <a:rPr sz="2400">
+                        <a:rPr sz="2200">
                           <a:solidFill>
                             <a:srgbClr val="14141E"/>
                           </a:solidFill>
@@ -7618,7 +9235,7 @@
                     <a:lstStyle/>
                     <a:p>
                       <a:r>
-                        <a:rPr sz="2400">
+                        <a:rPr sz="2200">
                           <a:solidFill>
                             <a:srgbClr val="14141E"/>
                           </a:solidFill>
@@ -7639,7 +9256,7 @@
                     <a:lstStyle/>
                     <a:p>
                       <a:r>
-                        <a:rPr sz="2400">
+                        <a:rPr sz="2200">
                           <a:solidFill>
                             <a:srgbClr val="14141E"/>
                           </a:solidFill>
@@ -7661,7 +9278,7 @@
       </p:graphicFrame>
       <p:sp>
         <p:nvSpPr>
-          <p:cNvPr id="6" name="Rectangle 5"/>
+          <p:cNvPr id="7" name="Rectangle 6"/>
           <p:cNvSpPr/>
           <p:nvPr/>
         </p:nvSpPr>
@@ -7704,7 +9321,7 @@
       </p:sp>
       <p:sp>
         <p:nvSpPr>
-          <p:cNvPr id="7" name="TextBox 6"/>
+          <p:cNvPr id="8" name="TextBox 7"/>
           <p:cNvSpPr txBox="1"/>
           <p:nvPr/>
         </p:nvSpPr>
@@ -7732,711 +9349,6 @@
                 </a:solidFill>
               </a:rPr>
               <a:t>1メッセージ：日本語検証は「十分に研究されていない」だけで皆無ではない</a:t>
-            </a:r>
-          </a:p>
-        </p:txBody>
-      </p:sp>
-    </p:spTree>
-  </p:cSld>
-  <p:clrMapOvr>
-    <a:masterClrMapping/>
-  </p:clrMapOvr>
-</p:sld>
-</file>
-
-<file path=ppt/slides/slide8.xml><?xml version="1.0" encoding="utf-8"?>
-<p:sld xmlns:a="http://schemas.openxmlformats.org/drawingml/2006/main" xmlns:p="http://schemas.openxmlformats.org/presentationml/2006/main" xmlns:r="http://schemas.openxmlformats.org/officeDocument/2006/relationships">
-  <p:cSld>
-    <p:spTree>
-      <p:nvGrpSpPr>
-        <p:cNvPr id="1" name=""/>
-        <p:cNvGrpSpPr/>
-        <p:nvPr/>
-      </p:nvGrpSpPr>
-      <p:grpSpPr/>
-      <p:sp>
-        <p:nvSpPr>
-          <p:cNvPr id="2" name="Rectangle 1"/>
-          <p:cNvSpPr/>
-          <p:nvPr/>
-        </p:nvSpPr>
-        <p:spPr>
-          <a:xfrm>
-            <a:off x="0" y="0"/>
-            <a:ext cx="12188952" cy="109728"/>
-          </a:xfrm>
-          <a:prstGeom prst="rect">
-            <a:avLst/>
-          </a:prstGeom>
-          <a:solidFill>
-            <a:srgbClr val="1A56AA"/>
-          </a:solidFill>
-          <a:ln>
-            <a:noFill/>
-          </a:ln>
-        </p:spPr>
-        <p:style>
-          <a:lnRef idx="1">
-            <a:schemeClr val="accent1"/>
-          </a:lnRef>
-          <a:fillRef idx="3">
-            <a:schemeClr val="accent1"/>
-          </a:fillRef>
-          <a:effectRef idx="2">
-            <a:schemeClr val="accent1"/>
-          </a:effectRef>
-          <a:fontRef idx="minor">
-            <a:schemeClr val="lt1"/>
-          </a:fontRef>
-        </p:style>
-        <p:txBody>
-          <a:bodyPr rtlCol="0" anchor="ctr"/>
-          <a:lstStyle/>
-          <a:p>
-            <a:pPr algn="ctr"/>
-          </a:p>
-        </p:txBody>
-      </p:sp>
-      <p:sp>
-        <p:nvSpPr>
-          <p:cNvPr id="3" name="TextBox 2"/>
-          <p:cNvSpPr txBox="1"/>
-          <p:nvPr/>
-        </p:nvSpPr>
-        <p:spPr>
-          <a:xfrm>
-            <a:off x="457200" y="292608"/>
-            <a:ext cx="10332720" cy="822960"/>
-          </a:xfrm>
-          <a:prstGeom prst="rect">
-            <a:avLst/>
-          </a:prstGeom>
-          <a:noFill/>
-        </p:spPr>
-        <p:txBody>
-          <a:bodyPr wrap="square">
-            <a:spAutoFit/>
-          </a:bodyPr>
-          <a:lstStyle/>
-          <a:p>
-            <a:pPr algn="l"/>
-            <a:r>
-              <a:rPr sz="3200" b="1" i="0">
-                <a:solidFill>
-                  <a:srgbClr val="14141E"/>
-                </a:solidFill>
-              </a:rPr>
-              <a:t>研究目的：主目的と付随目的</a:t>
-            </a:r>
-          </a:p>
-        </p:txBody>
-      </p:sp>
-      <p:sp>
-        <p:nvSpPr>
-          <p:cNvPr id="4" name="TextBox 3"/>
-          <p:cNvSpPr txBox="1"/>
-          <p:nvPr/>
-        </p:nvSpPr>
-        <p:spPr>
-          <a:xfrm>
-            <a:off x="10972800" y="292608"/>
-            <a:ext cx="1005840" cy="548640"/>
-          </a:xfrm>
-          <a:prstGeom prst="rect">
-            <a:avLst/>
-          </a:prstGeom>
-          <a:noFill/>
-        </p:spPr>
-        <p:txBody>
-          <a:bodyPr wrap="square">
-            <a:spAutoFit/>
-          </a:bodyPr>
-          <a:lstStyle/>
-          <a:p>
-            <a:pPr algn="r"/>
-            <a:r>
-              <a:rPr sz="2400" b="0" i="0">
-                <a:solidFill>
-                  <a:srgbClr val="1A56AA"/>
-                </a:solidFill>
-              </a:rPr>
-              <a:t>8/17</a:t>
-            </a:r>
-          </a:p>
-        </p:txBody>
-      </p:sp>
-      <p:sp>
-        <p:nvSpPr>
-          <p:cNvPr id="5" name="Rectangle 4"/>
-          <p:cNvSpPr/>
-          <p:nvPr/>
-        </p:nvSpPr>
-        <p:spPr>
-          <a:xfrm>
-            <a:off x="548640" y="1691640"/>
-            <a:ext cx="11064240" cy="1828800"/>
-          </a:xfrm>
-          <a:prstGeom prst="rect">
-            <a:avLst/>
-          </a:prstGeom>
-          <a:solidFill>
-            <a:srgbClr val="ECF1F9"/>
-          </a:solidFill>
-          <a:ln>
-            <a:noFill/>
-          </a:ln>
-        </p:spPr>
-        <p:style>
-          <a:lnRef idx="1">
-            <a:schemeClr val="accent1"/>
-          </a:lnRef>
-          <a:fillRef idx="3">
-            <a:schemeClr val="accent1"/>
-          </a:fillRef>
-          <a:effectRef idx="2">
-            <a:schemeClr val="accent1"/>
-          </a:effectRef>
-          <a:fontRef idx="minor">
-            <a:schemeClr val="lt1"/>
-          </a:fontRef>
-        </p:style>
-        <p:txBody>
-          <a:bodyPr rtlCol="0" anchor="ctr"/>
-          <a:lstStyle/>
-          <a:p>
-            <a:pPr algn="ctr"/>
-          </a:p>
-        </p:txBody>
-      </p:sp>
-      <p:sp>
-        <p:nvSpPr>
-          <p:cNvPr id="6" name="TextBox 5"/>
-          <p:cNvSpPr txBox="1"/>
-          <p:nvPr/>
-        </p:nvSpPr>
-        <p:spPr>
-          <a:xfrm>
-            <a:off x="777240" y="1783080"/>
-            <a:ext cx="10607040" cy="457200"/>
-          </a:xfrm>
-          <a:prstGeom prst="rect">
-            <a:avLst/>
-          </a:prstGeom>
-          <a:noFill/>
-        </p:spPr>
-        <p:txBody>
-          <a:bodyPr wrap="square">
-            <a:spAutoFit/>
-          </a:bodyPr>
-          <a:lstStyle/>
-          <a:p>
-            <a:pPr algn="l"/>
-            <a:r>
-              <a:rPr sz="2600" b="1" i="0">
-                <a:solidFill>
-                  <a:srgbClr val="1A56AA"/>
-                </a:solidFill>
-              </a:rPr>
-              <a:t>主たる目的</a:t>
-            </a:r>
-          </a:p>
-        </p:txBody>
-      </p:sp>
-      <p:sp>
-        <p:nvSpPr>
-          <p:cNvPr id="7" name="TextBox 6"/>
-          <p:cNvSpPr txBox="1"/>
-          <p:nvPr/>
-        </p:nvSpPr>
-        <p:spPr>
-          <a:xfrm>
-            <a:off x="777240" y="2194560"/>
-            <a:ext cx="10607040" cy="1234440"/>
-          </a:xfrm>
-          <a:prstGeom prst="rect">
-            <a:avLst/>
-          </a:prstGeom>
-          <a:noFill/>
-        </p:spPr>
-        <p:txBody>
-          <a:bodyPr wrap="square">
-            <a:spAutoFit/>
-          </a:bodyPr>
-          <a:lstStyle/>
-          <a:p>
-            <a:pPr algn="l"/>
-            <a:r>
-              <a:rPr sz="2600" b="0" i="0">
-                <a:solidFill>
-                  <a:srgbClr val="14141E"/>
-                </a:solidFill>
-              </a:rPr>
-              <a:t>日本語タスクで確信度プロンプト方式（Verb.1S/Verb.2S/Ling.1S）の違いは
-較正精度（ECE・Brier Score）にどのような差をもたらすか？</a:t>
-            </a:r>
-          </a:p>
-        </p:txBody>
-      </p:sp>
-      <p:sp>
-        <p:nvSpPr>
-          <p:cNvPr id="8" name="Rectangle 7"/>
-          <p:cNvSpPr/>
-          <p:nvPr/>
-        </p:nvSpPr>
-        <p:spPr>
-          <a:xfrm>
-            <a:off x="548640" y="3703320"/>
-            <a:ext cx="11064240" cy="1554480"/>
-          </a:xfrm>
-          <a:prstGeom prst="rect">
-            <a:avLst/>
-          </a:prstGeom>
-          <a:solidFill>
-            <a:srgbClr val="FFFFFF"/>
-          </a:solidFill>
-          <a:ln w="12700">
-            <a:solidFill>
-              <a:srgbClr val="1A56AA"/>
-            </a:solidFill>
-          </a:ln>
-        </p:spPr>
-        <p:style>
-          <a:lnRef idx="1">
-            <a:schemeClr val="accent1"/>
-          </a:lnRef>
-          <a:fillRef idx="3">
-            <a:schemeClr val="accent1"/>
-          </a:fillRef>
-          <a:effectRef idx="2">
-            <a:schemeClr val="accent1"/>
-          </a:effectRef>
-          <a:fontRef idx="minor">
-            <a:schemeClr val="lt1"/>
-          </a:fontRef>
-        </p:style>
-        <p:txBody>
-          <a:bodyPr rtlCol="0" anchor="ctr"/>
-          <a:lstStyle/>
-          <a:p>
-            <a:pPr algn="ctr"/>
-          </a:p>
-        </p:txBody>
-      </p:sp>
-      <p:sp>
-        <p:nvSpPr>
-          <p:cNvPr id="9" name="TextBox 8"/>
-          <p:cNvSpPr txBox="1"/>
-          <p:nvPr/>
-        </p:nvSpPr>
-        <p:spPr>
-          <a:xfrm>
-            <a:off x="777240" y="3794760"/>
-            <a:ext cx="10607040" cy="457200"/>
-          </a:xfrm>
-          <a:prstGeom prst="rect">
-            <a:avLst/>
-          </a:prstGeom>
-          <a:noFill/>
-        </p:spPr>
-        <p:txBody>
-          <a:bodyPr wrap="square">
-            <a:spAutoFit/>
-          </a:bodyPr>
-          <a:lstStyle/>
-          <a:p>
-            <a:pPr algn="l"/>
-            <a:r>
-              <a:rPr sz="2600" b="1" i="0">
-                <a:solidFill>
-                  <a:srgbClr val="B02A1E"/>
-                </a:solidFill>
-              </a:rPr>
-              <a:t>付随して明らかになること</a:t>
-            </a:r>
-          </a:p>
-        </p:txBody>
-      </p:sp>
-      <p:sp>
-        <p:nvSpPr>
-          <p:cNvPr id="10" name="TextBox 9"/>
-          <p:cNvSpPr txBox="1"/>
-          <p:nvPr/>
-        </p:nvSpPr>
-        <p:spPr>
-          <a:xfrm>
-            <a:off x="777240" y="4206240"/>
-            <a:ext cx="10607040" cy="914400"/>
-          </a:xfrm>
-          <a:prstGeom prst="rect">
-            <a:avLst/>
-          </a:prstGeom>
-          <a:noFill/>
-        </p:spPr>
-        <p:txBody>
-          <a:bodyPr wrap="square">
-            <a:spAutoFit/>
-          </a:bodyPr>
-          <a:lstStyle/>
-          <a:p>
-            <a:pPr algn="l"/>
-            <a:r>
-              <a:rPr sz="2600" b="0" i="0">
-                <a:solidFill>
-                  <a:srgbClr val="14141E"/>
-                </a:solidFill>
-              </a:rPr>
-              <a:t>その効果は現行世代の商用LLMでも再現されるか？</a:t>
-            </a:r>
-          </a:p>
-        </p:txBody>
-      </p:sp>
-      <p:sp>
-        <p:nvSpPr>
-          <p:cNvPr id="11" name="Rectangle 10"/>
-          <p:cNvSpPr/>
-          <p:nvPr/>
-        </p:nvSpPr>
-        <p:spPr>
-          <a:xfrm>
-            <a:off x="0" y="6263640"/>
-            <a:ext cx="12188952" cy="594360"/>
-          </a:xfrm>
-          <a:prstGeom prst="rect">
-            <a:avLst/>
-          </a:prstGeom>
-          <a:solidFill>
-            <a:srgbClr val="ECF1F9"/>
-          </a:solidFill>
-          <a:ln>
-            <a:noFill/>
-          </a:ln>
-        </p:spPr>
-        <p:style>
-          <a:lnRef idx="1">
-            <a:schemeClr val="accent1"/>
-          </a:lnRef>
-          <a:fillRef idx="3">
-            <a:schemeClr val="accent1"/>
-          </a:fillRef>
-          <a:effectRef idx="2">
-            <a:schemeClr val="accent1"/>
-          </a:effectRef>
-          <a:fontRef idx="minor">
-            <a:schemeClr val="lt1"/>
-          </a:fontRef>
-        </p:style>
-        <p:txBody>
-          <a:bodyPr rtlCol="0" anchor="ctr"/>
-          <a:lstStyle/>
-          <a:p>
-            <a:pPr algn="ctr"/>
-          </a:p>
-        </p:txBody>
-      </p:sp>
-      <p:sp>
-        <p:nvSpPr>
-          <p:cNvPr id="12" name="TextBox 11"/>
-          <p:cNvSpPr txBox="1"/>
-          <p:nvPr/>
-        </p:nvSpPr>
-        <p:spPr>
-          <a:xfrm>
-            <a:off x="457200" y="6309360"/>
-            <a:ext cx="11247120" cy="502920"/>
-          </a:xfrm>
-          <a:prstGeom prst="rect">
-            <a:avLst/>
-          </a:prstGeom>
-          <a:noFill/>
-        </p:spPr>
-        <p:txBody>
-          <a:bodyPr wrap="square">
-            <a:spAutoFit/>
-          </a:bodyPr>
-          <a:lstStyle/>
-          <a:p>
-            <a:pPr algn="l"/>
-            <a:r>
-              <a:rPr sz="2400" b="0" i="1">
-                <a:solidFill>
-                  <a:srgbClr val="1A56AA"/>
-                </a:solidFill>
-              </a:rPr>
-              <a:t>1メッセージ：主目的（方式間の差）と付随目的（再現性）を分けて示す</a:t>
-            </a:r>
-          </a:p>
-        </p:txBody>
-      </p:sp>
-    </p:spTree>
-  </p:cSld>
-  <p:clrMapOvr>
-    <a:masterClrMapping/>
-  </p:clrMapOvr>
-</p:sld>
-</file>
-
-<file path=ppt/slides/slide9.xml><?xml version="1.0" encoding="utf-8"?>
-<p:sld xmlns:a="http://schemas.openxmlformats.org/drawingml/2006/main" xmlns:p="http://schemas.openxmlformats.org/presentationml/2006/main" xmlns:r="http://schemas.openxmlformats.org/officeDocument/2006/relationships">
-  <p:cSld>
-    <p:spTree>
-      <p:nvGrpSpPr>
-        <p:cNvPr id="1" name=""/>
-        <p:cNvGrpSpPr/>
-        <p:nvPr/>
-      </p:nvGrpSpPr>
-      <p:grpSpPr/>
-      <p:sp>
-        <p:nvSpPr>
-          <p:cNvPr id="2" name="Rectangle 1"/>
-          <p:cNvSpPr/>
-          <p:nvPr/>
-        </p:nvSpPr>
-        <p:spPr>
-          <a:xfrm>
-            <a:off x="0" y="0"/>
-            <a:ext cx="12188952" cy="109728"/>
-          </a:xfrm>
-          <a:prstGeom prst="rect">
-            <a:avLst/>
-          </a:prstGeom>
-          <a:solidFill>
-            <a:srgbClr val="1A56AA"/>
-          </a:solidFill>
-          <a:ln>
-            <a:noFill/>
-          </a:ln>
-        </p:spPr>
-        <p:style>
-          <a:lnRef idx="1">
-            <a:schemeClr val="accent1"/>
-          </a:lnRef>
-          <a:fillRef idx="3">
-            <a:schemeClr val="accent1"/>
-          </a:fillRef>
-          <a:effectRef idx="2">
-            <a:schemeClr val="accent1"/>
-          </a:effectRef>
-          <a:fontRef idx="minor">
-            <a:schemeClr val="lt1"/>
-          </a:fontRef>
-        </p:style>
-        <p:txBody>
-          <a:bodyPr rtlCol="0" anchor="ctr"/>
-          <a:lstStyle/>
-          <a:p>
-            <a:pPr algn="ctr"/>
-          </a:p>
-        </p:txBody>
-      </p:sp>
-      <p:sp>
-        <p:nvSpPr>
-          <p:cNvPr id="3" name="TextBox 2"/>
-          <p:cNvSpPr txBox="1"/>
-          <p:nvPr/>
-        </p:nvSpPr>
-        <p:spPr>
-          <a:xfrm>
-            <a:off x="457200" y="292608"/>
-            <a:ext cx="10332720" cy="822960"/>
-          </a:xfrm>
-          <a:prstGeom prst="rect">
-            <a:avLst/>
-          </a:prstGeom>
-          <a:noFill/>
-        </p:spPr>
-        <p:txBody>
-          <a:bodyPr wrap="square">
-            <a:spAutoFit/>
-          </a:bodyPr>
-          <a:lstStyle/>
-          <a:p>
-            <a:pPr algn="l"/>
-            <a:r>
-              <a:rPr sz="3200" b="1" i="0">
-                <a:solidFill>
-                  <a:srgbClr val="14141E"/>
-                </a:solidFill>
-              </a:rPr>
-              <a:t>方針①：実験の全体像</a:t>
-            </a:r>
-          </a:p>
-        </p:txBody>
-      </p:sp>
-      <p:sp>
-        <p:nvSpPr>
-          <p:cNvPr id="4" name="TextBox 3"/>
-          <p:cNvSpPr txBox="1"/>
-          <p:nvPr/>
-        </p:nvSpPr>
-        <p:spPr>
-          <a:xfrm>
-            <a:off x="10972800" y="292608"/>
-            <a:ext cx="1005840" cy="548640"/>
-          </a:xfrm>
-          <a:prstGeom prst="rect">
-            <a:avLst/>
-          </a:prstGeom>
-          <a:noFill/>
-        </p:spPr>
-        <p:txBody>
-          <a:bodyPr wrap="square">
-            <a:spAutoFit/>
-          </a:bodyPr>
-          <a:lstStyle/>
-          <a:p>
-            <a:pPr algn="r"/>
-            <a:r>
-              <a:rPr sz="2400" b="0" i="0">
-                <a:solidFill>
-                  <a:srgbClr val="1A56AA"/>
-                </a:solidFill>
-              </a:rPr>
-              <a:t>9/17</a:t>
-            </a:r>
-          </a:p>
-        </p:txBody>
-      </p:sp>
-      <p:sp>
-        <p:nvSpPr>
-          <p:cNvPr id="5" name="TextBox 4"/>
-          <p:cNvSpPr txBox="1"/>
-          <p:nvPr/>
-        </p:nvSpPr>
-        <p:spPr>
-          <a:xfrm>
-            <a:off x="731520" y="1737360"/>
-            <a:ext cx="10698480" cy="3291840"/>
-          </a:xfrm>
-          <a:prstGeom prst="rect">
-            <a:avLst/>
-          </a:prstGeom>
-          <a:noFill/>
-        </p:spPr>
-        <p:txBody>
-          <a:bodyPr wrap="square">
-            <a:spAutoFit/>
-          </a:bodyPr>
-          <a:lstStyle/>
-          <a:p>
-            <a:pPr>
-              <a:spcBef>
-                <a:spcPts val="1800"/>
-              </a:spcBef>
-            </a:pPr>
-            <a:r>
-              <a:rPr sz="2800">
-                <a:solidFill>
-                  <a:srgbClr val="14141E"/>
-                </a:solidFill>
-              </a:rPr>
-              <a:t>・モデル：GPT-4o／Claude Sonnet 4.6／Gemini 2.x／Swallow（4〜6モデル）</a:t>
-            </a:r>
-          </a:p>
-          <a:p>
-            <a:pPr>
-              <a:spcBef>
-                <a:spcPts val="1800"/>
-              </a:spcBef>
-            </a:pPr>
-            <a:r>
-              <a:rPr sz="2800">
-                <a:solidFill>
-                  <a:srgbClr val="14141E"/>
-                </a:solidFill>
-              </a:rPr>
-              <a:t>・データセット：日本語4ドメイン × 250問 ＝ 計1,000問</a:t>
-            </a:r>
-          </a:p>
-          <a:p>
-            <a:pPr>
-              <a:spcBef>
-                <a:spcPts val="1800"/>
-              </a:spcBef>
-            </a:pPr>
-            <a:r>
-              <a:rPr sz="2800">
-                <a:solidFill>
-                  <a:srgbClr val="14141E"/>
-                </a:solidFill>
-              </a:rPr>
-              <a:t>・3つのプロンプト方式を比較（詳細は次スライド）</a:t>
-            </a:r>
-          </a:p>
-        </p:txBody>
-      </p:sp>
-      <p:sp>
-        <p:nvSpPr>
-          <p:cNvPr id="6" name="Rectangle 5"/>
-          <p:cNvSpPr/>
-          <p:nvPr/>
-        </p:nvSpPr>
-        <p:spPr>
-          <a:xfrm>
-            <a:off x="0" y="6263640"/>
-            <a:ext cx="12188952" cy="594360"/>
-          </a:xfrm>
-          <a:prstGeom prst="rect">
-            <a:avLst/>
-          </a:prstGeom>
-          <a:solidFill>
-            <a:srgbClr val="ECF1F9"/>
-          </a:solidFill>
-          <a:ln>
-            <a:noFill/>
-          </a:ln>
-        </p:spPr>
-        <p:style>
-          <a:lnRef idx="1">
-            <a:schemeClr val="accent1"/>
-          </a:lnRef>
-          <a:fillRef idx="3">
-            <a:schemeClr val="accent1"/>
-          </a:fillRef>
-          <a:effectRef idx="2">
-            <a:schemeClr val="accent1"/>
-          </a:effectRef>
-          <a:fontRef idx="minor">
-            <a:schemeClr val="lt1"/>
-          </a:fontRef>
-        </p:style>
-        <p:txBody>
-          <a:bodyPr rtlCol="0" anchor="ctr"/>
-          <a:lstStyle/>
-          <a:p>
-            <a:pPr algn="ctr"/>
-          </a:p>
-        </p:txBody>
-      </p:sp>
-      <p:sp>
-        <p:nvSpPr>
-          <p:cNvPr id="7" name="TextBox 6"/>
-          <p:cNvSpPr txBox="1"/>
-          <p:nvPr/>
-        </p:nvSpPr>
-        <p:spPr>
-          <a:xfrm>
-            <a:off x="457200" y="6309360"/>
-            <a:ext cx="11247120" cy="502920"/>
-          </a:xfrm>
-          <a:prstGeom prst="rect">
-            <a:avLst/>
-          </a:prstGeom>
-          <a:noFill/>
-        </p:spPr>
-        <p:txBody>
-          <a:bodyPr wrap="square">
-            <a:spAutoFit/>
-          </a:bodyPr>
-          <a:lstStyle/>
-          <a:p>
-            <a:pPr algn="l"/>
-            <a:r>
-              <a:rPr sz="2400" b="0" i="1">
-                <a:solidFill>
-                  <a:srgbClr val="1A56AA"/>
-                </a:solidFill>
-              </a:rPr>
-              <a:t>1メッセージ：何を何で比較するかの全体像</a:t>
             </a:r>
           </a:p>
         </p:txBody>
